--- a/public/videos/repositories/reserve-sys/reserve-sys-tech-preview.pptx
+++ b/public/videos/repositories/reserve-sys/reserve-sys-tech-preview.pptx
@@ -134,7 +134,7 @@
           <p:cNvPr id="2" name="タイトル 1">
             <a:extLst>
               <a:ext uri="{FF2B5EF4-FFF2-40B4-BE49-F238E27FC236}">
-                <a16:creationId xmlns:a16="http://schemas.microsoft.com/office/drawing/2014/main" id="{18FC7CD1-4F39-C6BE-6509-CC373B3A75C2}"/>
+                <a16:creationId xmlns:a16="http://schemas.microsoft.com/office/drawing/2014/main" id="{A136B881-D23A-7EDE-D3A7-A3DA450067B3}"/>
               </a:ext>
             </a:extLst>
           </p:cNvPr>
@@ -171,7 +171,7 @@
           <p:cNvPr id="3" name="字幕 2">
             <a:extLst>
               <a:ext uri="{FF2B5EF4-FFF2-40B4-BE49-F238E27FC236}">
-                <a16:creationId xmlns:a16="http://schemas.microsoft.com/office/drawing/2014/main" id="{A4E616D3-844A-A1C5-30C4-25EA67DCE44C}"/>
+                <a16:creationId xmlns:a16="http://schemas.microsoft.com/office/drawing/2014/main" id="{C6006623-06BE-F463-70E5-11AF0C03C1DA}"/>
               </a:ext>
             </a:extLst>
           </p:cNvPr>
@@ -241,7 +241,7 @@
           <p:cNvPr id="4" name="日付プレースホルダー 3">
             <a:extLst>
               <a:ext uri="{FF2B5EF4-FFF2-40B4-BE49-F238E27FC236}">
-                <a16:creationId xmlns:a16="http://schemas.microsoft.com/office/drawing/2014/main" id="{05BC3926-19EB-DF1B-F292-50E2A6737429}"/>
+                <a16:creationId xmlns:a16="http://schemas.microsoft.com/office/drawing/2014/main" id="{415227C6-5D57-58F3-6F3C-25ADB1B42CA9}"/>
               </a:ext>
             </a:extLst>
           </p:cNvPr>
@@ -257,7 +257,7 @@
           <a:bodyPr/>
           <a:lstStyle/>
           <a:p>
-            <a:fld id="{F818BDA9-9156-481F-8FFB-74D2460B4823}" type="datetimeFigureOut">
+            <a:fld id="{AD7F3C31-AADC-421A-A3BA-3DA6E648B9CB}" type="datetimeFigureOut">
               <a:rPr kumimoji="1" lang="ja-JP" altLang="en-US" smtClean="0"/>
               <a:t>2026/7/30</a:t>
             </a:fld>
@@ -270,7 +270,7 @@
           <p:cNvPr id="5" name="フッター プレースホルダー 4">
             <a:extLst>
               <a:ext uri="{FF2B5EF4-FFF2-40B4-BE49-F238E27FC236}">
-                <a16:creationId xmlns:a16="http://schemas.microsoft.com/office/drawing/2014/main" id="{990A0E1C-4C76-BC09-2868-C805B10A15E5}"/>
+                <a16:creationId xmlns:a16="http://schemas.microsoft.com/office/drawing/2014/main" id="{018F7347-4B62-3A21-A898-7F75FFC0BF05}"/>
               </a:ext>
             </a:extLst>
           </p:cNvPr>
@@ -295,7 +295,7 @@
           <p:cNvPr id="6" name="スライド番号プレースホルダー 5">
             <a:extLst>
               <a:ext uri="{FF2B5EF4-FFF2-40B4-BE49-F238E27FC236}">
-                <a16:creationId xmlns:a16="http://schemas.microsoft.com/office/drawing/2014/main" id="{62B4FA47-86D9-B194-CD24-7CB9B6A5D0C2}"/>
+                <a16:creationId xmlns:a16="http://schemas.microsoft.com/office/drawing/2014/main" id="{746AED18-652D-A86D-B2B1-1B62F78EE2DA}"/>
               </a:ext>
             </a:extLst>
           </p:cNvPr>
@@ -311,7 +311,7 @@
           <a:bodyPr/>
           <a:lstStyle/>
           <a:p>
-            <a:fld id="{82E0460F-2E5F-45FF-8539-38F7A680CD8E}" type="slidenum">
+            <a:fld id="{1C22CFA1-0640-430D-AC4F-C2F08AD884EE}" type="slidenum">
               <a:rPr kumimoji="1" lang="ja-JP" altLang="en-US" smtClean="0"/>
               <a:t>‹#›</a:t>
             </a:fld>
@@ -322,7 +322,7 @@
     </p:spTree>
     <p:extLst>
       <p:ext uri="{BB962C8B-B14F-4D97-AF65-F5344CB8AC3E}">
-        <p14:creationId xmlns:p14="http://schemas.microsoft.com/office/powerpoint/2010/main" val="1429030300"/>
+        <p14:creationId xmlns:p14="http://schemas.microsoft.com/office/powerpoint/2010/main" val="2871067274"/>
       </p:ext>
     </p:extLst>
   </p:cSld>
@@ -354,7 +354,7 @@
           <p:cNvPr id="2" name="タイトル 1">
             <a:extLst>
               <a:ext uri="{FF2B5EF4-FFF2-40B4-BE49-F238E27FC236}">
-                <a16:creationId xmlns:a16="http://schemas.microsoft.com/office/drawing/2014/main" id="{9E601368-8394-5302-E3D3-7B5B5D2A841D}"/>
+                <a16:creationId xmlns:a16="http://schemas.microsoft.com/office/drawing/2014/main" id="{B68D25B2-67DC-3A53-D98C-873B087B565D}"/>
               </a:ext>
             </a:extLst>
           </p:cNvPr>
@@ -382,7 +382,7 @@
           <p:cNvPr id="3" name="縦書きテキスト プレースホルダー 2">
             <a:extLst>
               <a:ext uri="{FF2B5EF4-FFF2-40B4-BE49-F238E27FC236}">
-                <a16:creationId xmlns:a16="http://schemas.microsoft.com/office/drawing/2014/main" id="{881C9E0C-3BA0-0B8B-7AEE-1761E77D3067}"/>
+                <a16:creationId xmlns:a16="http://schemas.microsoft.com/office/drawing/2014/main" id="{DE35CD33-7C82-7E10-E2AD-3B8AB9F237E7}"/>
               </a:ext>
             </a:extLst>
           </p:cNvPr>
@@ -471,7 +471,7 @@
           <p:cNvPr id="4" name="日付プレースホルダー 3">
             <a:extLst>
               <a:ext uri="{FF2B5EF4-FFF2-40B4-BE49-F238E27FC236}">
-                <a16:creationId xmlns:a16="http://schemas.microsoft.com/office/drawing/2014/main" id="{B6955B76-212F-F7E8-A7CD-479449016CA3}"/>
+                <a16:creationId xmlns:a16="http://schemas.microsoft.com/office/drawing/2014/main" id="{2C065DCC-5B3F-A4F5-1DA3-8A965722B9DD}"/>
               </a:ext>
             </a:extLst>
           </p:cNvPr>
@@ -487,7 +487,7 @@
           <a:bodyPr/>
           <a:lstStyle/>
           <a:p>
-            <a:fld id="{F818BDA9-9156-481F-8FFB-74D2460B4823}" type="datetimeFigureOut">
+            <a:fld id="{AD7F3C31-AADC-421A-A3BA-3DA6E648B9CB}" type="datetimeFigureOut">
               <a:rPr kumimoji="1" lang="ja-JP" altLang="en-US" smtClean="0"/>
               <a:t>2026/7/30</a:t>
             </a:fld>
@@ -500,7 +500,7 @@
           <p:cNvPr id="5" name="フッター プレースホルダー 4">
             <a:extLst>
               <a:ext uri="{FF2B5EF4-FFF2-40B4-BE49-F238E27FC236}">
-                <a16:creationId xmlns:a16="http://schemas.microsoft.com/office/drawing/2014/main" id="{33953313-F12F-0812-94A1-BA4AD9AAC10D}"/>
+                <a16:creationId xmlns:a16="http://schemas.microsoft.com/office/drawing/2014/main" id="{D8F04D95-664E-F16E-2135-628A01806364}"/>
               </a:ext>
             </a:extLst>
           </p:cNvPr>
@@ -525,7 +525,7 @@
           <p:cNvPr id="6" name="スライド番号プレースホルダー 5">
             <a:extLst>
               <a:ext uri="{FF2B5EF4-FFF2-40B4-BE49-F238E27FC236}">
-                <a16:creationId xmlns:a16="http://schemas.microsoft.com/office/drawing/2014/main" id="{D46CB229-F370-354E-C405-C841F43628EF}"/>
+                <a16:creationId xmlns:a16="http://schemas.microsoft.com/office/drawing/2014/main" id="{F9231DDD-26CA-AA83-DF6D-D4BFA0555D76}"/>
               </a:ext>
             </a:extLst>
           </p:cNvPr>
@@ -541,7 +541,7 @@
           <a:bodyPr/>
           <a:lstStyle/>
           <a:p>
-            <a:fld id="{82E0460F-2E5F-45FF-8539-38F7A680CD8E}" type="slidenum">
+            <a:fld id="{1C22CFA1-0640-430D-AC4F-C2F08AD884EE}" type="slidenum">
               <a:rPr kumimoji="1" lang="ja-JP" altLang="en-US" smtClean="0"/>
               <a:t>‹#›</a:t>
             </a:fld>
@@ -552,7 +552,7 @@
     </p:spTree>
     <p:extLst>
       <p:ext uri="{BB962C8B-B14F-4D97-AF65-F5344CB8AC3E}">
-        <p14:creationId xmlns:p14="http://schemas.microsoft.com/office/powerpoint/2010/main" val="4172369542"/>
+        <p14:creationId xmlns:p14="http://schemas.microsoft.com/office/powerpoint/2010/main" val="3858170942"/>
       </p:ext>
     </p:extLst>
   </p:cSld>
@@ -584,7 +584,7 @@
           <p:cNvPr id="2" name="縦書きタイトル 1">
             <a:extLst>
               <a:ext uri="{FF2B5EF4-FFF2-40B4-BE49-F238E27FC236}">
-                <a16:creationId xmlns:a16="http://schemas.microsoft.com/office/drawing/2014/main" id="{90978B0D-09BC-8951-0B69-76512DA45242}"/>
+                <a16:creationId xmlns:a16="http://schemas.microsoft.com/office/drawing/2014/main" id="{80F27238-708A-D3CC-911F-160C7E682F3A}"/>
               </a:ext>
             </a:extLst>
           </p:cNvPr>
@@ -617,7 +617,7 @@
           <p:cNvPr id="3" name="縦書きテキスト プレースホルダー 2">
             <a:extLst>
               <a:ext uri="{FF2B5EF4-FFF2-40B4-BE49-F238E27FC236}">
-                <a16:creationId xmlns:a16="http://schemas.microsoft.com/office/drawing/2014/main" id="{95E6E0AD-B538-732B-DC63-01DC9E0C136C}"/>
+                <a16:creationId xmlns:a16="http://schemas.microsoft.com/office/drawing/2014/main" id="{D4F2574D-9040-DD0B-8BAC-75C17643E0DF}"/>
               </a:ext>
             </a:extLst>
           </p:cNvPr>
@@ -711,7 +711,7 @@
           <p:cNvPr id="4" name="日付プレースホルダー 3">
             <a:extLst>
               <a:ext uri="{FF2B5EF4-FFF2-40B4-BE49-F238E27FC236}">
-                <a16:creationId xmlns:a16="http://schemas.microsoft.com/office/drawing/2014/main" id="{00013DCC-9D4D-3702-2A74-5BD41CD83D8A}"/>
+                <a16:creationId xmlns:a16="http://schemas.microsoft.com/office/drawing/2014/main" id="{4DA37DAC-50DC-36C3-D501-ED70237601A2}"/>
               </a:ext>
             </a:extLst>
           </p:cNvPr>
@@ -727,7 +727,7 @@
           <a:bodyPr/>
           <a:lstStyle/>
           <a:p>
-            <a:fld id="{F818BDA9-9156-481F-8FFB-74D2460B4823}" type="datetimeFigureOut">
+            <a:fld id="{AD7F3C31-AADC-421A-A3BA-3DA6E648B9CB}" type="datetimeFigureOut">
               <a:rPr kumimoji="1" lang="ja-JP" altLang="en-US" smtClean="0"/>
               <a:t>2026/7/30</a:t>
             </a:fld>
@@ -740,7 +740,7 @@
           <p:cNvPr id="5" name="フッター プレースホルダー 4">
             <a:extLst>
               <a:ext uri="{FF2B5EF4-FFF2-40B4-BE49-F238E27FC236}">
-                <a16:creationId xmlns:a16="http://schemas.microsoft.com/office/drawing/2014/main" id="{EFDFA8F8-5A10-C93B-1AFA-8D80F5AACD7E}"/>
+                <a16:creationId xmlns:a16="http://schemas.microsoft.com/office/drawing/2014/main" id="{C3A8085F-6BA4-E131-C9B6-A814247F46CC}"/>
               </a:ext>
             </a:extLst>
           </p:cNvPr>
@@ -765,7 +765,7 @@
           <p:cNvPr id="6" name="スライド番号プレースホルダー 5">
             <a:extLst>
               <a:ext uri="{FF2B5EF4-FFF2-40B4-BE49-F238E27FC236}">
-                <a16:creationId xmlns:a16="http://schemas.microsoft.com/office/drawing/2014/main" id="{2AFD34CE-0A5C-010D-BEC2-8372CDA18D2A}"/>
+                <a16:creationId xmlns:a16="http://schemas.microsoft.com/office/drawing/2014/main" id="{7B9D01CF-5303-5C06-00D0-AF0BDDA172AC}"/>
               </a:ext>
             </a:extLst>
           </p:cNvPr>
@@ -781,7 +781,7 @@
           <a:bodyPr/>
           <a:lstStyle/>
           <a:p>
-            <a:fld id="{82E0460F-2E5F-45FF-8539-38F7A680CD8E}" type="slidenum">
+            <a:fld id="{1C22CFA1-0640-430D-AC4F-C2F08AD884EE}" type="slidenum">
               <a:rPr kumimoji="1" lang="ja-JP" altLang="en-US" smtClean="0"/>
               <a:t>‹#›</a:t>
             </a:fld>
@@ -792,7 +792,7 @@
     </p:spTree>
     <p:extLst>
       <p:ext uri="{BB962C8B-B14F-4D97-AF65-F5344CB8AC3E}">
-        <p14:creationId xmlns:p14="http://schemas.microsoft.com/office/powerpoint/2010/main" val="351149752"/>
+        <p14:creationId xmlns:p14="http://schemas.microsoft.com/office/powerpoint/2010/main" val="4172684345"/>
       </p:ext>
     </p:extLst>
   </p:cSld>
@@ -824,7 +824,7 @@
           <p:cNvPr id="2" name="タイトル 1">
             <a:extLst>
               <a:ext uri="{FF2B5EF4-FFF2-40B4-BE49-F238E27FC236}">
-                <a16:creationId xmlns:a16="http://schemas.microsoft.com/office/drawing/2014/main" id="{4C21A10F-1E6E-80BA-F7DD-6F9BD77889C0}"/>
+                <a16:creationId xmlns:a16="http://schemas.microsoft.com/office/drawing/2014/main" id="{10EE72A9-7AFA-FFAC-36BD-1A455DAAE081}"/>
               </a:ext>
             </a:extLst>
           </p:cNvPr>
@@ -852,7 +852,7 @@
           <p:cNvPr id="3" name="コンテンツ プレースホルダー 2">
             <a:extLst>
               <a:ext uri="{FF2B5EF4-FFF2-40B4-BE49-F238E27FC236}">
-                <a16:creationId xmlns:a16="http://schemas.microsoft.com/office/drawing/2014/main" id="{DAA7D19A-BA10-8356-DF98-C95D533D3C91}"/>
+                <a16:creationId xmlns:a16="http://schemas.microsoft.com/office/drawing/2014/main" id="{55A321FF-D7FD-5F8F-7F23-8CE37154E729}"/>
               </a:ext>
             </a:extLst>
           </p:cNvPr>
@@ -941,7 +941,7 @@
           <p:cNvPr id="4" name="日付プレースホルダー 3">
             <a:extLst>
               <a:ext uri="{FF2B5EF4-FFF2-40B4-BE49-F238E27FC236}">
-                <a16:creationId xmlns:a16="http://schemas.microsoft.com/office/drawing/2014/main" id="{82AA9FB6-208E-9684-BB33-496149004E3C}"/>
+                <a16:creationId xmlns:a16="http://schemas.microsoft.com/office/drawing/2014/main" id="{DFDBFB61-82CA-3290-743D-7C2BB579ED77}"/>
               </a:ext>
             </a:extLst>
           </p:cNvPr>
@@ -957,7 +957,7 @@
           <a:bodyPr/>
           <a:lstStyle/>
           <a:p>
-            <a:fld id="{F818BDA9-9156-481F-8FFB-74D2460B4823}" type="datetimeFigureOut">
+            <a:fld id="{AD7F3C31-AADC-421A-A3BA-3DA6E648B9CB}" type="datetimeFigureOut">
               <a:rPr kumimoji="1" lang="ja-JP" altLang="en-US" smtClean="0"/>
               <a:t>2026/7/30</a:t>
             </a:fld>
@@ -970,7 +970,7 @@
           <p:cNvPr id="5" name="フッター プレースホルダー 4">
             <a:extLst>
               <a:ext uri="{FF2B5EF4-FFF2-40B4-BE49-F238E27FC236}">
-                <a16:creationId xmlns:a16="http://schemas.microsoft.com/office/drawing/2014/main" id="{9698F385-61AE-EE18-9F27-BA98E64F99B2}"/>
+                <a16:creationId xmlns:a16="http://schemas.microsoft.com/office/drawing/2014/main" id="{F065BADA-08DB-2D74-30E1-F150CE49C8AA}"/>
               </a:ext>
             </a:extLst>
           </p:cNvPr>
@@ -995,7 +995,7 @@
           <p:cNvPr id="6" name="スライド番号プレースホルダー 5">
             <a:extLst>
               <a:ext uri="{FF2B5EF4-FFF2-40B4-BE49-F238E27FC236}">
-                <a16:creationId xmlns:a16="http://schemas.microsoft.com/office/drawing/2014/main" id="{AA035319-073A-E87B-AD37-4A8BDE53BEF1}"/>
+                <a16:creationId xmlns:a16="http://schemas.microsoft.com/office/drawing/2014/main" id="{F3E70D9B-B51E-CC42-748D-89296687A2AD}"/>
               </a:ext>
             </a:extLst>
           </p:cNvPr>
@@ -1011,7 +1011,7 @@
           <a:bodyPr/>
           <a:lstStyle/>
           <a:p>
-            <a:fld id="{82E0460F-2E5F-45FF-8539-38F7A680CD8E}" type="slidenum">
+            <a:fld id="{1C22CFA1-0640-430D-AC4F-C2F08AD884EE}" type="slidenum">
               <a:rPr kumimoji="1" lang="ja-JP" altLang="en-US" smtClean="0"/>
               <a:t>‹#›</a:t>
             </a:fld>
@@ -1022,7 +1022,7 @@
     </p:spTree>
     <p:extLst>
       <p:ext uri="{BB962C8B-B14F-4D97-AF65-F5344CB8AC3E}">
-        <p14:creationId xmlns:p14="http://schemas.microsoft.com/office/powerpoint/2010/main" val="2208770153"/>
+        <p14:creationId xmlns:p14="http://schemas.microsoft.com/office/powerpoint/2010/main" val="2488547458"/>
       </p:ext>
     </p:extLst>
   </p:cSld>
@@ -1054,7 +1054,7 @@
           <p:cNvPr id="2" name="タイトル 1">
             <a:extLst>
               <a:ext uri="{FF2B5EF4-FFF2-40B4-BE49-F238E27FC236}">
-                <a16:creationId xmlns:a16="http://schemas.microsoft.com/office/drawing/2014/main" id="{1CA601C6-01BE-3D10-3D45-17A83E43EFE1}"/>
+                <a16:creationId xmlns:a16="http://schemas.microsoft.com/office/drawing/2014/main" id="{49DED08E-E9D6-3B80-3C49-A73772BC6612}"/>
               </a:ext>
             </a:extLst>
           </p:cNvPr>
@@ -1091,7 +1091,7 @@
           <p:cNvPr id="3" name="テキスト プレースホルダー 2">
             <a:extLst>
               <a:ext uri="{FF2B5EF4-FFF2-40B4-BE49-F238E27FC236}">
-                <a16:creationId xmlns:a16="http://schemas.microsoft.com/office/drawing/2014/main" id="{DA75193E-7778-7A5E-6193-B2E717739F1F}"/>
+                <a16:creationId xmlns:a16="http://schemas.microsoft.com/office/drawing/2014/main" id="{13D3B579-373A-FEAB-DCD4-81802EA614E9}"/>
               </a:ext>
             </a:extLst>
           </p:cNvPr>
@@ -1216,7 +1216,7 @@
           <p:cNvPr id="4" name="日付プレースホルダー 3">
             <a:extLst>
               <a:ext uri="{FF2B5EF4-FFF2-40B4-BE49-F238E27FC236}">
-                <a16:creationId xmlns:a16="http://schemas.microsoft.com/office/drawing/2014/main" id="{9CE98768-A220-60CB-F2CB-8C53EDB85461}"/>
+                <a16:creationId xmlns:a16="http://schemas.microsoft.com/office/drawing/2014/main" id="{5E6D98C8-B845-9249-61F2-246AE6D090E1}"/>
               </a:ext>
             </a:extLst>
           </p:cNvPr>
@@ -1232,7 +1232,7 @@
           <a:bodyPr/>
           <a:lstStyle/>
           <a:p>
-            <a:fld id="{F818BDA9-9156-481F-8FFB-74D2460B4823}" type="datetimeFigureOut">
+            <a:fld id="{AD7F3C31-AADC-421A-A3BA-3DA6E648B9CB}" type="datetimeFigureOut">
               <a:rPr kumimoji="1" lang="ja-JP" altLang="en-US" smtClean="0"/>
               <a:t>2026/7/30</a:t>
             </a:fld>
@@ -1245,7 +1245,7 @@
           <p:cNvPr id="5" name="フッター プレースホルダー 4">
             <a:extLst>
               <a:ext uri="{FF2B5EF4-FFF2-40B4-BE49-F238E27FC236}">
-                <a16:creationId xmlns:a16="http://schemas.microsoft.com/office/drawing/2014/main" id="{50217A0F-D08E-62D7-92EF-CEF49AD28893}"/>
+                <a16:creationId xmlns:a16="http://schemas.microsoft.com/office/drawing/2014/main" id="{FC1EA3FC-6D06-DE2A-7359-E996B68582AA}"/>
               </a:ext>
             </a:extLst>
           </p:cNvPr>
@@ -1270,7 +1270,7 @@
           <p:cNvPr id="6" name="スライド番号プレースホルダー 5">
             <a:extLst>
               <a:ext uri="{FF2B5EF4-FFF2-40B4-BE49-F238E27FC236}">
-                <a16:creationId xmlns:a16="http://schemas.microsoft.com/office/drawing/2014/main" id="{D6E5E713-2841-BA18-9D0F-C82DDFECA63D}"/>
+                <a16:creationId xmlns:a16="http://schemas.microsoft.com/office/drawing/2014/main" id="{63D90F53-3E44-7CAD-E9F0-7FAB001050F6}"/>
               </a:ext>
             </a:extLst>
           </p:cNvPr>
@@ -1286,7 +1286,7 @@
           <a:bodyPr/>
           <a:lstStyle/>
           <a:p>
-            <a:fld id="{82E0460F-2E5F-45FF-8539-38F7A680CD8E}" type="slidenum">
+            <a:fld id="{1C22CFA1-0640-430D-AC4F-C2F08AD884EE}" type="slidenum">
               <a:rPr kumimoji="1" lang="ja-JP" altLang="en-US" smtClean="0"/>
               <a:t>‹#›</a:t>
             </a:fld>
@@ -1297,7 +1297,7 @@
     </p:spTree>
     <p:extLst>
       <p:ext uri="{BB962C8B-B14F-4D97-AF65-F5344CB8AC3E}">
-        <p14:creationId xmlns:p14="http://schemas.microsoft.com/office/powerpoint/2010/main" val="779350752"/>
+        <p14:creationId xmlns:p14="http://schemas.microsoft.com/office/powerpoint/2010/main" val="3696691500"/>
       </p:ext>
     </p:extLst>
   </p:cSld>
@@ -1329,7 +1329,7 @@
           <p:cNvPr id="2" name="タイトル 1">
             <a:extLst>
               <a:ext uri="{FF2B5EF4-FFF2-40B4-BE49-F238E27FC236}">
-                <a16:creationId xmlns:a16="http://schemas.microsoft.com/office/drawing/2014/main" id="{D635EF2D-A417-73FD-0E27-54B5F096698B}"/>
+                <a16:creationId xmlns:a16="http://schemas.microsoft.com/office/drawing/2014/main" id="{FC543B34-1344-3470-7286-3A367F73783B}"/>
               </a:ext>
             </a:extLst>
           </p:cNvPr>
@@ -1357,7 +1357,7 @@
           <p:cNvPr id="3" name="コンテンツ プレースホルダー 2">
             <a:extLst>
               <a:ext uri="{FF2B5EF4-FFF2-40B4-BE49-F238E27FC236}">
-                <a16:creationId xmlns:a16="http://schemas.microsoft.com/office/drawing/2014/main" id="{0EECFB14-8827-015B-655F-86F7961EAE22}"/>
+                <a16:creationId xmlns:a16="http://schemas.microsoft.com/office/drawing/2014/main" id="{49E342F3-E707-1959-3790-1619F421C9AB}"/>
               </a:ext>
             </a:extLst>
           </p:cNvPr>
@@ -1451,7 +1451,7 @@
           <p:cNvPr id="4" name="コンテンツ プレースホルダー 3">
             <a:extLst>
               <a:ext uri="{FF2B5EF4-FFF2-40B4-BE49-F238E27FC236}">
-                <a16:creationId xmlns:a16="http://schemas.microsoft.com/office/drawing/2014/main" id="{2E1A43EF-6684-9BA1-B0C3-C370F225038F}"/>
+                <a16:creationId xmlns:a16="http://schemas.microsoft.com/office/drawing/2014/main" id="{3E7A6134-7BEB-D951-6CB5-2B7F75A6E03B}"/>
               </a:ext>
             </a:extLst>
           </p:cNvPr>
@@ -1545,7 +1545,7 @@
           <p:cNvPr id="5" name="日付プレースホルダー 4">
             <a:extLst>
               <a:ext uri="{FF2B5EF4-FFF2-40B4-BE49-F238E27FC236}">
-                <a16:creationId xmlns:a16="http://schemas.microsoft.com/office/drawing/2014/main" id="{B085E6E1-F031-87E1-C7A0-B738BC319764}"/>
+                <a16:creationId xmlns:a16="http://schemas.microsoft.com/office/drawing/2014/main" id="{4189E74E-5B5E-3479-D52D-0F449E0E1396}"/>
               </a:ext>
             </a:extLst>
           </p:cNvPr>
@@ -1561,7 +1561,7 @@
           <a:bodyPr/>
           <a:lstStyle/>
           <a:p>
-            <a:fld id="{F818BDA9-9156-481F-8FFB-74D2460B4823}" type="datetimeFigureOut">
+            <a:fld id="{AD7F3C31-AADC-421A-A3BA-3DA6E648B9CB}" type="datetimeFigureOut">
               <a:rPr kumimoji="1" lang="ja-JP" altLang="en-US" smtClean="0"/>
               <a:t>2026/7/30</a:t>
             </a:fld>
@@ -1574,7 +1574,7 @@
           <p:cNvPr id="6" name="フッター プレースホルダー 5">
             <a:extLst>
               <a:ext uri="{FF2B5EF4-FFF2-40B4-BE49-F238E27FC236}">
-                <a16:creationId xmlns:a16="http://schemas.microsoft.com/office/drawing/2014/main" id="{AA9CAB0A-624E-4484-AB5E-618EADAE4723}"/>
+                <a16:creationId xmlns:a16="http://schemas.microsoft.com/office/drawing/2014/main" id="{81289F02-BF85-66F7-90C0-A9A3896B31E5}"/>
               </a:ext>
             </a:extLst>
           </p:cNvPr>
@@ -1599,7 +1599,7 @@
           <p:cNvPr id="7" name="スライド番号プレースホルダー 6">
             <a:extLst>
               <a:ext uri="{FF2B5EF4-FFF2-40B4-BE49-F238E27FC236}">
-                <a16:creationId xmlns:a16="http://schemas.microsoft.com/office/drawing/2014/main" id="{08882D5B-B0CC-DFFA-C490-55B2879E539A}"/>
+                <a16:creationId xmlns:a16="http://schemas.microsoft.com/office/drawing/2014/main" id="{A015F3CF-0526-64FF-72C0-80AD4E241AC6}"/>
               </a:ext>
             </a:extLst>
           </p:cNvPr>
@@ -1615,7 +1615,7 @@
           <a:bodyPr/>
           <a:lstStyle/>
           <a:p>
-            <a:fld id="{82E0460F-2E5F-45FF-8539-38F7A680CD8E}" type="slidenum">
+            <a:fld id="{1C22CFA1-0640-430D-AC4F-C2F08AD884EE}" type="slidenum">
               <a:rPr kumimoji="1" lang="ja-JP" altLang="en-US" smtClean="0"/>
               <a:t>‹#›</a:t>
             </a:fld>
@@ -1626,7 +1626,7 @@
     </p:spTree>
     <p:extLst>
       <p:ext uri="{BB962C8B-B14F-4D97-AF65-F5344CB8AC3E}">
-        <p14:creationId xmlns:p14="http://schemas.microsoft.com/office/powerpoint/2010/main" val="3487746323"/>
+        <p14:creationId xmlns:p14="http://schemas.microsoft.com/office/powerpoint/2010/main" val="4128149175"/>
       </p:ext>
     </p:extLst>
   </p:cSld>
@@ -1658,7 +1658,7 @@
           <p:cNvPr id="2" name="タイトル 1">
             <a:extLst>
               <a:ext uri="{FF2B5EF4-FFF2-40B4-BE49-F238E27FC236}">
-                <a16:creationId xmlns:a16="http://schemas.microsoft.com/office/drawing/2014/main" id="{0B575F98-E6DD-6B98-F468-E58F563BD383}"/>
+                <a16:creationId xmlns:a16="http://schemas.microsoft.com/office/drawing/2014/main" id="{6EAA25B3-1E32-95CD-7E45-65521B8A11A9}"/>
               </a:ext>
             </a:extLst>
           </p:cNvPr>
@@ -1691,7 +1691,7 @@
           <p:cNvPr id="3" name="テキスト プレースホルダー 2">
             <a:extLst>
               <a:ext uri="{FF2B5EF4-FFF2-40B4-BE49-F238E27FC236}">
-                <a16:creationId xmlns:a16="http://schemas.microsoft.com/office/drawing/2014/main" id="{2EF4D531-FBBF-3A74-E0C7-F5E70C0516EB}"/>
+                <a16:creationId xmlns:a16="http://schemas.microsoft.com/office/drawing/2014/main" id="{ED36D1DD-61A8-E3E9-8FC9-6159E75D3194}"/>
               </a:ext>
             </a:extLst>
           </p:cNvPr>
@@ -1762,7 +1762,7 @@
           <p:cNvPr id="4" name="コンテンツ プレースホルダー 3">
             <a:extLst>
               <a:ext uri="{FF2B5EF4-FFF2-40B4-BE49-F238E27FC236}">
-                <a16:creationId xmlns:a16="http://schemas.microsoft.com/office/drawing/2014/main" id="{0EB25BDA-3C12-B5B3-33CD-6A317CF3419F}"/>
+                <a16:creationId xmlns:a16="http://schemas.microsoft.com/office/drawing/2014/main" id="{EB1844A2-1CA4-166D-016E-CE4CFA2098CC}"/>
               </a:ext>
             </a:extLst>
           </p:cNvPr>
@@ -1856,7 +1856,7 @@
           <p:cNvPr id="5" name="テキスト プレースホルダー 4">
             <a:extLst>
               <a:ext uri="{FF2B5EF4-FFF2-40B4-BE49-F238E27FC236}">
-                <a16:creationId xmlns:a16="http://schemas.microsoft.com/office/drawing/2014/main" id="{60EA09AA-35FC-EAAC-996F-34CDDA352239}"/>
+                <a16:creationId xmlns:a16="http://schemas.microsoft.com/office/drawing/2014/main" id="{85EF2DCE-761B-DAFD-E7A7-EB8B8A05C74C}"/>
               </a:ext>
             </a:extLst>
           </p:cNvPr>
@@ -1927,7 +1927,7 @@
           <p:cNvPr id="6" name="コンテンツ プレースホルダー 5">
             <a:extLst>
               <a:ext uri="{FF2B5EF4-FFF2-40B4-BE49-F238E27FC236}">
-                <a16:creationId xmlns:a16="http://schemas.microsoft.com/office/drawing/2014/main" id="{F93A9D3D-DF66-7E97-B319-9A8E76F8DCA9}"/>
+                <a16:creationId xmlns:a16="http://schemas.microsoft.com/office/drawing/2014/main" id="{D300A92A-06B6-D237-6983-71687483EB3B}"/>
               </a:ext>
             </a:extLst>
           </p:cNvPr>
@@ -2021,7 +2021,7 @@
           <p:cNvPr id="7" name="日付プレースホルダー 6">
             <a:extLst>
               <a:ext uri="{FF2B5EF4-FFF2-40B4-BE49-F238E27FC236}">
-                <a16:creationId xmlns:a16="http://schemas.microsoft.com/office/drawing/2014/main" id="{0F77AD01-B7DD-8A42-E42F-05B36810DC9A}"/>
+                <a16:creationId xmlns:a16="http://schemas.microsoft.com/office/drawing/2014/main" id="{6B74A086-B1CA-2988-18D2-B447B0DE5596}"/>
               </a:ext>
             </a:extLst>
           </p:cNvPr>
@@ -2037,7 +2037,7 @@
           <a:bodyPr/>
           <a:lstStyle/>
           <a:p>
-            <a:fld id="{F818BDA9-9156-481F-8FFB-74D2460B4823}" type="datetimeFigureOut">
+            <a:fld id="{AD7F3C31-AADC-421A-A3BA-3DA6E648B9CB}" type="datetimeFigureOut">
               <a:rPr kumimoji="1" lang="ja-JP" altLang="en-US" smtClean="0"/>
               <a:t>2026/7/30</a:t>
             </a:fld>
@@ -2050,7 +2050,7 @@
           <p:cNvPr id="8" name="フッター プレースホルダー 7">
             <a:extLst>
               <a:ext uri="{FF2B5EF4-FFF2-40B4-BE49-F238E27FC236}">
-                <a16:creationId xmlns:a16="http://schemas.microsoft.com/office/drawing/2014/main" id="{4B47D285-B9C5-9036-E9E6-71B232501C57}"/>
+                <a16:creationId xmlns:a16="http://schemas.microsoft.com/office/drawing/2014/main" id="{577FA307-ECE6-F286-A1D2-3596C3D4D8C6}"/>
               </a:ext>
             </a:extLst>
           </p:cNvPr>
@@ -2075,7 +2075,7 @@
           <p:cNvPr id="9" name="スライド番号プレースホルダー 8">
             <a:extLst>
               <a:ext uri="{FF2B5EF4-FFF2-40B4-BE49-F238E27FC236}">
-                <a16:creationId xmlns:a16="http://schemas.microsoft.com/office/drawing/2014/main" id="{BFE3F2C1-5E3D-BD3A-C4E5-97553A165EDB}"/>
+                <a16:creationId xmlns:a16="http://schemas.microsoft.com/office/drawing/2014/main" id="{5703E17B-35EC-7649-AE92-29B7DA8D5844}"/>
               </a:ext>
             </a:extLst>
           </p:cNvPr>
@@ -2091,7 +2091,7 @@
           <a:bodyPr/>
           <a:lstStyle/>
           <a:p>
-            <a:fld id="{82E0460F-2E5F-45FF-8539-38F7A680CD8E}" type="slidenum">
+            <a:fld id="{1C22CFA1-0640-430D-AC4F-C2F08AD884EE}" type="slidenum">
               <a:rPr kumimoji="1" lang="ja-JP" altLang="en-US" smtClean="0"/>
               <a:t>‹#›</a:t>
             </a:fld>
@@ -2102,7 +2102,7 @@
     </p:spTree>
     <p:extLst>
       <p:ext uri="{BB962C8B-B14F-4D97-AF65-F5344CB8AC3E}">
-        <p14:creationId xmlns:p14="http://schemas.microsoft.com/office/powerpoint/2010/main" val="1805692480"/>
+        <p14:creationId xmlns:p14="http://schemas.microsoft.com/office/powerpoint/2010/main" val="4198700668"/>
       </p:ext>
     </p:extLst>
   </p:cSld>
@@ -2134,7 +2134,7 @@
           <p:cNvPr id="2" name="タイトル 1">
             <a:extLst>
               <a:ext uri="{FF2B5EF4-FFF2-40B4-BE49-F238E27FC236}">
-                <a16:creationId xmlns:a16="http://schemas.microsoft.com/office/drawing/2014/main" id="{618B1748-F951-14CB-A396-40AE7E6441E6}"/>
+                <a16:creationId xmlns:a16="http://schemas.microsoft.com/office/drawing/2014/main" id="{D4084D24-DC30-EFF7-ACD8-99F9C5D2134D}"/>
               </a:ext>
             </a:extLst>
           </p:cNvPr>
@@ -2162,7 +2162,7 @@
           <p:cNvPr id="3" name="日付プレースホルダー 2">
             <a:extLst>
               <a:ext uri="{FF2B5EF4-FFF2-40B4-BE49-F238E27FC236}">
-                <a16:creationId xmlns:a16="http://schemas.microsoft.com/office/drawing/2014/main" id="{2DBC1841-B53F-5B99-9BB9-FE7E28B6936B}"/>
+                <a16:creationId xmlns:a16="http://schemas.microsoft.com/office/drawing/2014/main" id="{F7965DCD-58DE-A0C9-9DB7-D36127BA1696}"/>
               </a:ext>
             </a:extLst>
           </p:cNvPr>
@@ -2178,7 +2178,7 @@
           <a:bodyPr/>
           <a:lstStyle/>
           <a:p>
-            <a:fld id="{F818BDA9-9156-481F-8FFB-74D2460B4823}" type="datetimeFigureOut">
+            <a:fld id="{AD7F3C31-AADC-421A-A3BA-3DA6E648B9CB}" type="datetimeFigureOut">
               <a:rPr kumimoji="1" lang="ja-JP" altLang="en-US" smtClean="0"/>
               <a:t>2026/7/30</a:t>
             </a:fld>
@@ -2191,7 +2191,7 @@
           <p:cNvPr id="4" name="フッター プレースホルダー 3">
             <a:extLst>
               <a:ext uri="{FF2B5EF4-FFF2-40B4-BE49-F238E27FC236}">
-                <a16:creationId xmlns:a16="http://schemas.microsoft.com/office/drawing/2014/main" id="{DF521730-585C-F7AE-97D8-BF75AB130098}"/>
+                <a16:creationId xmlns:a16="http://schemas.microsoft.com/office/drawing/2014/main" id="{E1DC2B97-448B-07C9-B628-F654F94112AE}"/>
               </a:ext>
             </a:extLst>
           </p:cNvPr>
@@ -2216,7 +2216,7 @@
           <p:cNvPr id="5" name="スライド番号プレースホルダー 4">
             <a:extLst>
               <a:ext uri="{FF2B5EF4-FFF2-40B4-BE49-F238E27FC236}">
-                <a16:creationId xmlns:a16="http://schemas.microsoft.com/office/drawing/2014/main" id="{F233CA3B-E477-CF87-2AC2-33F775C6FC55}"/>
+                <a16:creationId xmlns:a16="http://schemas.microsoft.com/office/drawing/2014/main" id="{49B299EC-6DBE-7B62-0BCD-1E687E2C5C7F}"/>
               </a:ext>
             </a:extLst>
           </p:cNvPr>
@@ -2232,7 +2232,7 @@
           <a:bodyPr/>
           <a:lstStyle/>
           <a:p>
-            <a:fld id="{82E0460F-2E5F-45FF-8539-38F7A680CD8E}" type="slidenum">
+            <a:fld id="{1C22CFA1-0640-430D-AC4F-C2F08AD884EE}" type="slidenum">
               <a:rPr kumimoji="1" lang="ja-JP" altLang="en-US" smtClean="0"/>
               <a:t>‹#›</a:t>
             </a:fld>
@@ -2243,7 +2243,7 @@
     </p:spTree>
     <p:extLst>
       <p:ext uri="{BB962C8B-B14F-4D97-AF65-F5344CB8AC3E}">
-        <p14:creationId xmlns:p14="http://schemas.microsoft.com/office/powerpoint/2010/main" val="3543641902"/>
+        <p14:creationId xmlns:p14="http://schemas.microsoft.com/office/powerpoint/2010/main" val="3472293482"/>
       </p:ext>
     </p:extLst>
   </p:cSld>
@@ -2275,7 +2275,7 @@
           <p:cNvPr id="2" name="日付プレースホルダー 1">
             <a:extLst>
               <a:ext uri="{FF2B5EF4-FFF2-40B4-BE49-F238E27FC236}">
-                <a16:creationId xmlns:a16="http://schemas.microsoft.com/office/drawing/2014/main" id="{A390FBFE-B338-71E8-9F91-30840B8D907F}"/>
+                <a16:creationId xmlns:a16="http://schemas.microsoft.com/office/drawing/2014/main" id="{24F40FA5-9E26-2080-F765-73A064DE3E1E}"/>
               </a:ext>
             </a:extLst>
           </p:cNvPr>
@@ -2291,7 +2291,7 @@
           <a:bodyPr/>
           <a:lstStyle/>
           <a:p>
-            <a:fld id="{F818BDA9-9156-481F-8FFB-74D2460B4823}" type="datetimeFigureOut">
+            <a:fld id="{AD7F3C31-AADC-421A-A3BA-3DA6E648B9CB}" type="datetimeFigureOut">
               <a:rPr kumimoji="1" lang="ja-JP" altLang="en-US" smtClean="0"/>
               <a:t>2026/7/30</a:t>
             </a:fld>
@@ -2304,7 +2304,7 @@
           <p:cNvPr id="3" name="フッター プレースホルダー 2">
             <a:extLst>
               <a:ext uri="{FF2B5EF4-FFF2-40B4-BE49-F238E27FC236}">
-                <a16:creationId xmlns:a16="http://schemas.microsoft.com/office/drawing/2014/main" id="{D4EED581-F1CC-282C-CB65-2687BE156725}"/>
+                <a16:creationId xmlns:a16="http://schemas.microsoft.com/office/drawing/2014/main" id="{BDBB8CAC-0D1D-A967-93AA-92A9FFF41D9B}"/>
               </a:ext>
             </a:extLst>
           </p:cNvPr>
@@ -2329,7 +2329,7 @@
           <p:cNvPr id="4" name="スライド番号プレースホルダー 3">
             <a:extLst>
               <a:ext uri="{FF2B5EF4-FFF2-40B4-BE49-F238E27FC236}">
-                <a16:creationId xmlns:a16="http://schemas.microsoft.com/office/drawing/2014/main" id="{51D49751-C157-B2BE-986D-BBB978385CD9}"/>
+                <a16:creationId xmlns:a16="http://schemas.microsoft.com/office/drawing/2014/main" id="{AAE3B4D2-A7F1-A151-AA0E-96A490AE1E30}"/>
               </a:ext>
             </a:extLst>
           </p:cNvPr>
@@ -2345,7 +2345,7 @@
           <a:bodyPr/>
           <a:lstStyle/>
           <a:p>
-            <a:fld id="{82E0460F-2E5F-45FF-8539-38F7A680CD8E}" type="slidenum">
+            <a:fld id="{1C22CFA1-0640-430D-AC4F-C2F08AD884EE}" type="slidenum">
               <a:rPr kumimoji="1" lang="ja-JP" altLang="en-US" smtClean="0"/>
               <a:t>‹#›</a:t>
             </a:fld>
@@ -2356,7 +2356,7 @@
     </p:spTree>
     <p:extLst>
       <p:ext uri="{BB962C8B-B14F-4D97-AF65-F5344CB8AC3E}">
-        <p14:creationId xmlns:p14="http://schemas.microsoft.com/office/powerpoint/2010/main" val="975848958"/>
+        <p14:creationId xmlns:p14="http://schemas.microsoft.com/office/powerpoint/2010/main" val="2484465787"/>
       </p:ext>
     </p:extLst>
   </p:cSld>
@@ -2388,7 +2388,7 @@
           <p:cNvPr id="2" name="タイトル 1">
             <a:extLst>
               <a:ext uri="{FF2B5EF4-FFF2-40B4-BE49-F238E27FC236}">
-                <a16:creationId xmlns:a16="http://schemas.microsoft.com/office/drawing/2014/main" id="{BACEF6CC-0ECB-80E2-B293-FBBC51FFB311}"/>
+                <a16:creationId xmlns:a16="http://schemas.microsoft.com/office/drawing/2014/main" id="{8A6D9070-49B8-FB16-5371-628F168A26F0}"/>
               </a:ext>
             </a:extLst>
           </p:cNvPr>
@@ -2425,7 +2425,7 @@
           <p:cNvPr id="3" name="コンテンツ プレースホルダー 2">
             <a:extLst>
               <a:ext uri="{FF2B5EF4-FFF2-40B4-BE49-F238E27FC236}">
-                <a16:creationId xmlns:a16="http://schemas.microsoft.com/office/drawing/2014/main" id="{8064AC60-123F-E1C6-8387-07E67ED53244}"/>
+                <a16:creationId xmlns:a16="http://schemas.microsoft.com/office/drawing/2014/main" id="{2E8E549F-40CA-73FB-085A-B635C7614F18}"/>
               </a:ext>
             </a:extLst>
           </p:cNvPr>
@@ -2547,7 +2547,7 @@
           <p:cNvPr id="4" name="テキスト プレースホルダー 3">
             <a:extLst>
               <a:ext uri="{FF2B5EF4-FFF2-40B4-BE49-F238E27FC236}">
-                <a16:creationId xmlns:a16="http://schemas.microsoft.com/office/drawing/2014/main" id="{7B907DF7-BD1A-AE28-EE07-7530813B2E62}"/>
+                <a16:creationId xmlns:a16="http://schemas.microsoft.com/office/drawing/2014/main" id="{EB7EF714-0913-502C-64DA-2BC7D768031D}"/>
               </a:ext>
             </a:extLst>
           </p:cNvPr>
@@ -2618,7 +2618,7 @@
           <p:cNvPr id="5" name="日付プレースホルダー 4">
             <a:extLst>
               <a:ext uri="{FF2B5EF4-FFF2-40B4-BE49-F238E27FC236}">
-                <a16:creationId xmlns:a16="http://schemas.microsoft.com/office/drawing/2014/main" id="{53F0FE76-A761-E9C3-BC0F-16A6FFC108FD}"/>
+                <a16:creationId xmlns:a16="http://schemas.microsoft.com/office/drawing/2014/main" id="{F4B12162-FCBC-781A-F10E-B73E7B0B6D18}"/>
               </a:ext>
             </a:extLst>
           </p:cNvPr>
@@ -2634,7 +2634,7 @@
           <a:bodyPr/>
           <a:lstStyle/>
           <a:p>
-            <a:fld id="{F818BDA9-9156-481F-8FFB-74D2460B4823}" type="datetimeFigureOut">
+            <a:fld id="{AD7F3C31-AADC-421A-A3BA-3DA6E648B9CB}" type="datetimeFigureOut">
               <a:rPr kumimoji="1" lang="ja-JP" altLang="en-US" smtClean="0"/>
               <a:t>2026/7/30</a:t>
             </a:fld>
@@ -2647,7 +2647,7 @@
           <p:cNvPr id="6" name="フッター プレースホルダー 5">
             <a:extLst>
               <a:ext uri="{FF2B5EF4-FFF2-40B4-BE49-F238E27FC236}">
-                <a16:creationId xmlns:a16="http://schemas.microsoft.com/office/drawing/2014/main" id="{6A1F505D-65F2-E03A-3DED-90462F0076A9}"/>
+                <a16:creationId xmlns:a16="http://schemas.microsoft.com/office/drawing/2014/main" id="{C82CF6CD-1BB5-9032-AC67-ABB389355CC4}"/>
               </a:ext>
             </a:extLst>
           </p:cNvPr>
@@ -2672,7 +2672,7 @@
           <p:cNvPr id="7" name="スライド番号プレースホルダー 6">
             <a:extLst>
               <a:ext uri="{FF2B5EF4-FFF2-40B4-BE49-F238E27FC236}">
-                <a16:creationId xmlns:a16="http://schemas.microsoft.com/office/drawing/2014/main" id="{18526983-E003-5370-8D10-04F67320BCDD}"/>
+                <a16:creationId xmlns:a16="http://schemas.microsoft.com/office/drawing/2014/main" id="{A350E1E1-6F98-97A2-AEE6-78B258AEC529}"/>
               </a:ext>
             </a:extLst>
           </p:cNvPr>
@@ -2688,7 +2688,7 @@
           <a:bodyPr/>
           <a:lstStyle/>
           <a:p>
-            <a:fld id="{82E0460F-2E5F-45FF-8539-38F7A680CD8E}" type="slidenum">
+            <a:fld id="{1C22CFA1-0640-430D-AC4F-C2F08AD884EE}" type="slidenum">
               <a:rPr kumimoji="1" lang="ja-JP" altLang="en-US" smtClean="0"/>
               <a:t>‹#›</a:t>
             </a:fld>
@@ -2699,7 +2699,7 @@
     </p:spTree>
     <p:extLst>
       <p:ext uri="{BB962C8B-B14F-4D97-AF65-F5344CB8AC3E}">
-        <p14:creationId xmlns:p14="http://schemas.microsoft.com/office/powerpoint/2010/main" val="531072520"/>
+        <p14:creationId xmlns:p14="http://schemas.microsoft.com/office/powerpoint/2010/main" val="1844877927"/>
       </p:ext>
     </p:extLst>
   </p:cSld>
@@ -2731,7 +2731,7 @@
           <p:cNvPr id="2" name="タイトル 1">
             <a:extLst>
               <a:ext uri="{FF2B5EF4-FFF2-40B4-BE49-F238E27FC236}">
-                <a16:creationId xmlns:a16="http://schemas.microsoft.com/office/drawing/2014/main" id="{7EC70196-3FE2-7E92-CD5B-973BEEF86AF1}"/>
+                <a16:creationId xmlns:a16="http://schemas.microsoft.com/office/drawing/2014/main" id="{201D4957-4568-86A7-37B7-E8C0685F5A4C}"/>
               </a:ext>
             </a:extLst>
           </p:cNvPr>
@@ -2768,7 +2768,7 @@
           <p:cNvPr id="3" name="図プレースホルダー 2">
             <a:extLst>
               <a:ext uri="{FF2B5EF4-FFF2-40B4-BE49-F238E27FC236}">
-                <a16:creationId xmlns:a16="http://schemas.microsoft.com/office/drawing/2014/main" id="{FB2A9372-C7A4-C092-74D3-4838AD278C62}"/>
+                <a16:creationId xmlns:a16="http://schemas.microsoft.com/office/drawing/2014/main" id="{21DEE9C1-AA68-9BD5-1F6F-307371FCBDF4}"/>
               </a:ext>
             </a:extLst>
           </p:cNvPr>
@@ -2835,7 +2835,7 @@
           <p:cNvPr id="4" name="テキスト プレースホルダー 3">
             <a:extLst>
               <a:ext uri="{FF2B5EF4-FFF2-40B4-BE49-F238E27FC236}">
-                <a16:creationId xmlns:a16="http://schemas.microsoft.com/office/drawing/2014/main" id="{5CA14EFC-1333-7AF0-0898-1E84A4B4DC7F}"/>
+                <a16:creationId xmlns:a16="http://schemas.microsoft.com/office/drawing/2014/main" id="{CCF19F2A-243F-27A4-9EAA-274FD377B14D}"/>
               </a:ext>
             </a:extLst>
           </p:cNvPr>
@@ -2906,7 +2906,7 @@
           <p:cNvPr id="5" name="日付プレースホルダー 4">
             <a:extLst>
               <a:ext uri="{FF2B5EF4-FFF2-40B4-BE49-F238E27FC236}">
-                <a16:creationId xmlns:a16="http://schemas.microsoft.com/office/drawing/2014/main" id="{473846B4-7539-C413-88EA-265627180362}"/>
+                <a16:creationId xmlns:a16="http://schemas.microsoft.com/office/drawing/2014/main" id="{79202822-AD8E-EDAB-4FEA-1B805708B827}"/>
               </a:ext>
             </a:extLst>
           </p:cNvPr>
@@ -2922,7 +2922,7 @@
           <a:bodyPr/>
           <a:lstStyle/>
           <a:p>
-            <a:fld id="{F818BDA9-9156-481F-8FFB-74D2460B4823}" type="datetimeFigureOut">
+            <a:fld id="{AD7F3C31-AADC-421A-A3BA-3DA6E648B9CB}" type="datetimeFigureOut">
               <a:rPr kumimoji="1" lang="ja-JP" altLang="en-US" smtClean="0"/>
               <a:t>2026/7/30</a:t>
             </a:fld>
@@ -2935,7 +2935,7 @@
           <p:cNvPr id="6" name="フッター プレースホルダー 5">
             <a:extLst>
               <a:ext uri="{FF2B5EF4-FFF2-40B4-BE49-F238E27FC236}">
-                <a16:creationId xmlns:a16="http://schemas.microsoft.com/office/drawing/2014/main" id="{F1552BFE-FF57-5580-D8D1-81EFE785C0F5}"/>
+                <a16:creationId xmlns:a16="http://schemas.microsoft.com/office/drawing/2014/main" id="{1A7FC04C-F4BD-7074-352D-F51764545F80}"/>
               </a:ext>
             </a:extLst>
           </p:cNvPr>
@@ -2960,7 +2960,7 @@
           <p:cNvPr id="7" name="スライド番号プレースホルダー 6">
             <a:extLst>
               <a:ext uri="{FF2B5EF4-FFF2-40B4-BE49-F238E27FC236}">
-                <a16:creationId xmlns:a16="http://schemas.microsoft.com/office/drawing/2014/main" id="{CC9C4127-7B78-B127-2944-C7D641C05D1F}"/>
+                <a16:creationId xmlns:a16="http://schemas.microsoft.com/office/drawing/2014/main" id="{9BC9EE28-999D-4414-9C96-74A2F201A64B}"/>
               </a:ext>
             </a:extLst>
           </p:cNvPr>
@@ -2976,7 +2976,7 @@
           <a:bodyPr/>
           <a:lstStyle/>
           <a:p>
-            <a:fld id="{82E0460F-2E5F-45FF-8539-38F7A680CD8E}" type="slidenum">
+            <a:fld id="{1C22CFA1-0640-430D-AC4F-C2F08AD884EE}" type="slidenum">
               <a:rPr kumimoji="1" lang="ja-JP" altLang="en-US" smtClean="0"/>
               <a:t>‹#›</a:t>
             </a:fld>
@@ -2987,7 +2987,7 @@
     </p:spTree>
     <p:extLst>
       <p:ext uri="{BB962C8B-B14F-4D97-AF65-F5344CB8AC3E}">
-        <p14:creationId xmlns:p14="http://schemas.microsoft.com/office/powerpoint/2010/main" val="4162878785"/>
+        <p14:creationId xmlns:p14="http://schemas.microsoft.com/office/powerpoint/2010/main" val="673911608"/>
       </p:ext>
     </p:extLst>
   </p:cSld>
@@ -3024,7 +3024,7 @@
           <p:cNvPr id="2" name="タイトル プレースホルダー 1">
             <a:extLst>
               <a:ext uri="{FF2B5EF4-FFF2-40B4-BE49-F238E27FC236}">
-                <a16:creationId xmlns:a16="http://schemas.microsoft.com/office/drawing/2014/main" id="{169F0833-0A52-5C33-1CA2-7913C97FAD69}"/>
+                <a16:creationId xmlns:a16="http://schemas.microsoft.com/office/drawing/2014/main" id="{82DF255E-DB5F-3138-92C0-F60FEC455E75}"/>
               </a:ext>
             </a:extLst>
           </p:cNvPr>
@@ -3062,7 +3062,7 @@
           <p:cNvPr id="3" name="テキスト プレースホルダー 2">
             <a:extLst>
               <a:ext uri="{FF2B5EF4-FFF2-40B4-BE49-F238E27FC236}">
-                <a16:creationId xmlns:a16="http://schemas.microsoft.com/office/drawing/2014/main" id="{D50370CF-2873-650C-1F86-1FF7A6479163}"/>
+                <a16:creationId xmlns:a16="http://schemas.microsoft.com/office/drawing/2014/main" id="{E5BC3810-749D-0572-5A7B-B4FD84CA6DA5}"/>
               </a:ext>
             </a:extLst>
           </p:cNvPr>
@@ -3161,7 +3161,7 @@
           <p:cNvPr id="4" name="日付プレースホルダー 3">
             <a:extLst>
               <a:ext uri="{FF2B5EF4-FFF2-40B4-BE49-F238E27FC236}">
-                <a16:creationId xmlns:a16="http://schemas.microsoft.com/office/drawing/2014/main" id="{C3298740-9511-9CC2-628F-04272D9945F9}"/>
+                <a16:creationId xmlns:a16="http://schemas.microsoft.com/office/drawing/2014/main" id="{104669C7-A46E-497B-D17C-2E96B72A3D47}"/>
               </a:ext>
             </a:extLst>
           </p:cNvPr>
@@ -3195,7 +3195,7 @@
             </a:lvl1pPr>
           </a:lstStyle>
           <a:p>
-            <a:fld id="{F818BDA9-9156-481F-8FFB-74D2460B4823}" type="datetimeFigureOut">
+            <a:fld id="{AD7F3C31-AADC-421A-A3BA-3DA6E648B9CB}" type="datetimeFigureOut">
               <a:rPr kumimoji="1" lang="ja-JP" altLang="en-US" smtClean="0"/>
               <a:t>2026/7/30</a:t>
             </a:fld>
@@ -3208,7 +3208,7 @@
           <p:cNvPr id="5" name="フッター プレースホルダー 4">
             <a:extLst>
               <a:ext uri="{FF2B5EF4-FFF2-40B4-BE49-F238E27FC236}">
-                <a16:creationId xmlns:a16="http://schemas.microsoft.com/office/drawing/2014/main" id="{5506AC3C-6913-CE5D-FF38-64E003E74A23}"/>
+                <a16:creationId xmlns:a16="http://schemas.microsoft.com/office/drawing/2014/main" id="{270483DB-487A-3290-913F-CC38D780DB9E}"/>
               </a:ext>
             </a:extLst>
           </p:cNvPr>
@@ -3251,7 +3251,7 @@
           <p:cNvPr id="6" name="スライド番号プレースホルダー 5">
             <a:extLst>
               <a:ext uri="{FF2B5EF4-FFF2-40B4-BE49-F238E27FC236}">
-                <a16:creationId xmlns:a16="http://schemas.microsoft.com/office/drawing/2014/main" id="{0946D9A8-AA4A-0C0F-12AB-2F112E23AF43}"/>
+                <a16:creationId xmlns:a16="http://schemas.microsoft.com/office/drawing/2014/main" id="{B260C137-B59C-6560-965B-2945B60CAE08}"/>
               </a:ext>
             </a:extLst>
           </p:cNvPr>
@@ -3285,7 +3285,7 @@
             </a:lvl1pPr>
           </a:lstStyle>
           <a:p>
-            <a:fld id="{82E0460F-2E5F-45FF-8539-38F7A680CD8E}" type="slidenum">
+            <a:fld id="{1C22CFA1-0640-430D-AC4F-C2F08AD884EE}" type="slidenum">
               <a:rPr kumimoji="1" lang="ja-JP" altLang="en-US" smtClean="0"/>
               <a:t>‹#›</a:t>
             </a:fld>
@@ -3296,7 +3296,7 @@
     </p:spTree>
     <p:extLst>
       <p:ext uri="{BB962C8B-B14F-4D97-AF65-F5344CB8AC3E}">
-        <p14:creationId xmlns:p14="http://schemas.microsoft.com/office/powerpoint/2010/main" val="1712596347"/>
+        <p14:creationId xmlns:p14="http://schemas.microsoft.com/office/powerpoint/2010/main" val="530261011"/>
       </p:ext>
     </p:extLst>
   </p:cSld>
@@ -3619,7 +3619,7 @@
           <p:cNvPr id="2" name="テキスト ボックス 1">
             <a:extLst>
               <a:ext uri="{FF2B5EF4-FFF2-40B4-BE49-F238E27FC236}">
-                <a16:creationId xmlns:a16="http://schemas.microsoft.com/office/drawing/2014/main" id="{85634752-DDB4-301E-4B9C-9F116F6C8691}"/>
+                <a16:creationId xmlns:a16="http://schemas.microsoft.com/office/drawing/2014/main" id="{D9FCE6D9-4081-2A7A-655B-F562F25DB7BA}"/>
               </a:ext>
             </a:extLst>
           </p:cNvPr>
@@ -3665,7 +3665,7 @@
           <p:cNvPr id="3" name="テキスト ボックス 2">
             <a:extLst>
               <a:ext uri="{FF2B5EF4-FFF2-40B4-BE49-F238E27FC236}">
-                <a16:creationId xmlns:a16="http://schemas.microsoft.com/office/drawing/2014/main" id="{BA17D4B0-98D4-5FCE-F09F-CF042FEB563F}"/>
+                <a16:creationId xmlns:a16="http://schemas.microsoft.com/office/drawing/2014/main" id="{DBFB5958-4857-00CF-CA14-95593EAB43FF}"/>
               </a:ext>
             </a:extLst>
           </p:cNvPr>
@@ -3695,14 +3695,17 @@
                 </a:solidFill>
                 <a:latin typeface="Arial" panose="020B0604020202020204" pitchFamily="34" charset="0"/>
               </a:rPr>
-              <a:t>reserve-sys TECH EXPLANATION</a:t>
-            </a:r>
-            <a:endParaRPr kumimoji="1" lang="ja-JP" altLang="en-US" sz="3400" b="1">
-              <a:solidFill>
-                <a:srgbClr val="111111"/>
-              </a:solidFill>
-              <a:latin typeface="Arial" panose="020B0604020202020204" pitchFamily="34" charset="0"/>
-            </a:endParaRPr>
+              <a:t>Reserve Sys</a:t>
+            </a:r>
+            <a:r>
+              <a:rPr kumimoji="1" lang="ja-JP" altLang="en-US" sz="3400" b="1">
+                <a:solidFill>
+                  <a:srgbClr val="111111"/>
+                </a:solidFill>
+                <a:latin typeface="Arial" panose="020B0604020202020204" pitchFamily="34" charset="0"/>
+              </a:rPr>
+              <a:t>の技術解説</a:t>
+            </a:r>
           </a:p>
         </p:txBody>
       </p:sp>
@@ -3711,7 +3714,7 @@
           <p:cNvPr id="4" name="テキスト ボックス 3">
             <a:extLst>
               <a:ext uri="{FF2B5EF4-FFF2-40B4-BE49-F238E27FC236}">
-                <a16:creationId xmlns:a16="http://schemas.microsoft.com/office/drawing/2014/main" id="{D9FDD142-487A-878F-A941-704765821572}"/>
+                <a16:creationId xmlns:a16="http://schemas.microsoft.com/office/drawing/2014/main" id="{4EC3623F-6834-F384-0C09-DD6B5F1DF1D4}"/>
               </a:ext>
             </a:extLst>
           </p:cNvPr>
@@ -3735,20 +3738,14 @@
           <a:lstStyle/>
           <a:p>
             <a:r>
-              <a:rPr kumimoji="1" lang="en-US" altLang="ja-JP" sz="2000">
+              <a:rPr kumimoji="1" lang="ja-JP" altLang="en-US" sz="2000">
                 <a:solidFill>
                   <a:srgbClr val="333333"/>
                 </a:solidFill>
                 <a:latin typeface="Arial" panose="020B0604020202020204" pitchFamily="34" charset="0"/>
               </a:rPr>
-              <a:t>Architecture, implementation and commit history in 75 seconds</a:t>
-            </a:r>
-            <a:endParaRPr kumimoji="1" lang="ja-JP" altLang="en-US" sz="2000">
-              <a:solidFill>
-                <a:srgbClr val="333333"/>
-              </a:solidFill>
-              <a:latin typeface="Arial" panose="020B0604020202020204" pitchFamily="34" charset="0"/>
-            </a:endParaRPr>
+              <a:t>設計・実装・コミットから学ぶ短時間プレビュー</a:t>
+            </a:r>
           </a:p>
         </p:txBody>
       </p:sp>
@@ -3757,7 +3754,7 @@
           <p:cNvPr id="5" name="テキスト ボックス 4">
             <a:extLst>
               <a:ext uri="{FF2B5EF4-FFF2-40B4-BE49-F238E27FC236}">
-                <a16:creationId xmlns:a16="http://schemas.microsoft.com/office/drawing/2014/main" id="{1DCDE7BB-D862-74B3-C8E5-1179D5A0E337}"/>
+                <a16:creationId xmlns:a16="http://schemas.microsoft.com/office/drawing/2014/main" id="{C677D19C-F8B8-58E8-9693-C9F3EC1B8D1E}"/>
               </a:ext>
             </a:extLst>
           </p:cNvPr>
@@ -3804,7 +3801,7 @@
             <a:hlinkClick r:id="" action="ppaction://media"/>
             <a:extLst>
               <a:ext uri="{FF2B5EF4-FFF2-40B4-BE49-F238E27FC236}">
-                <a16:creationId xmlns:a16="http://schemas.microsoft.com/office/drawing/2014/main" id="{024F0FAF-E525-9125-6218-42EF34D7B7E0}"/>
+                <a16:creationId xmlns:a16="http://schemas.microsoft.com/office/drawing/2014/main" id="{1ADDB2EB-E977-EF2E-3ED3-68CD58DBA1DB}"/>
               </a:ext>
             </a:extLst>
           </p:cNvPr>
@@ -3839,7 +3836,7 @@
     </p:spTree>
     <p:extLst>
       <p:ext uri="{BB962C8B-B14F-4D97-AF65-F5344CB8AC3E}">
-        <p14:creationId xmlns:p14="http://schemas.microsoft.com/office/powerpoint/2010/main" val="791901729"/>
+        <p14:creationId xmlns:p14="http://schemas.microsoft.com/office/powerpoint/2010/main" val="3871679068"/>
       </p:ext>
     </p:extLst>
   </p:cSld>
@@ -3963,7 +3960,7 @@
           <p:cNvPr id="2" name="テキスト ボックス 1">
             <a:extLst>
               <a:ext uri="{FF2B5EF4-FFF2-40B4-BE49-F238E27FC236}">
-                <a16:creationId xmlns:a16="http://schemas.microsoft.com/office/drawing/2014/main" id="{2F8CD552-D73B-8F4D-1412-395BB4D169D7}"/>
+                <a16:creationId xmlns:a16="http://schemas.microsoft.com/office/drawing/2014/main" id="{361E47DC-09D2-D52F-BB21-E7E78FD8F116}"/>
               </a:ext>
             </a:extLst>
           </p:cNvPr>
@@ -4009,7 +4006,7 @@
           <p:cNvPr id="3" name="テキスト ボックス 2">
             <a:extLst>
               <a:ext uri="{FF2B5EF4-FFF2-40B4-BE49-F238E27FC236}">
-                <a16:creationId xmlns:a16="http://schemas.microsoft.com/office/drawing/2014/main" id="{ED8F40E9-30CD-F470-8D1C-59E2829257C3}"/>
+                <a16:creationId xmlns:a16="http://schemas.microsoft.com/office/drawing/2014/main" id="{7C1E34A0-7379-1A8E-74C2-83E54BEC8270}"/>
               </a:ext>
             </a:extLst>
           </p:cNvPr>
@@ -4033,20 +4030,14 @@
           <a:lstStyle/>
           <a:p>
             <a:r>
-              <a:rPr kumimoji="1" lang="en-US" altLang="ja-JP" sz="3400" b="1">
+              <a:rPr kumimoji="1" lang="ja-JP" altLang="en-US" sz="3400" b="1">
                 <a:solidFill>
                   <a:srgbClr val="111111"/>
                 </a:solidFill>
                 <a:latin typeface="Arial" panose="020B0604020202020204" pitchFamily="34" charset="0"/>
               </a:rPr>
-              <a:t>WHAT DOES IT SOLVE?</a:t>
-            </a:r>
-            <a:endParaRPr kumimoji="1" lang="ja-JP" altLang="en-US" sz="3400" b="1">
-              <a:solidFill>
-                <a:srgbClr val="111111"/>
-              </a:solidFill>
-              <a:latin typeface="Arial" panose="020B0604020202020204" pitchFamily="34" charset="0"/>
-            </a:endParaRPr>
+              <a:t>このプロジェクトは何を解決する？</a:t>
+            </a:r>
           </a:p>
         </p:txBody>
       </p:sp>
@@ -4055,7 +4046,7 @@
           <p:cNvPr id="4" name="テキスト ボックス 3">
             <a:extLst>
               <a:ext uri="{FF2B5EF4-FFF2-40B4-BE49-F238E27FC236}">
-                <a16:creationId xmlns:a16="http://schemas.microsoft.com/office/drawing/2014/main" id="{C3D55EC3-D456-D57D-0D8C-D5D37B58D26D}"/>
+                <a16:creationId xmlns:a16="http://schemas.microsoft.com/office/drawing/2014/main" id="{F0B33313-7DC2-001A-4BDB-571A5FEFFD70}"/>
               </a:ext>
             </a:extLst>
           </p:cNvPr>
@@ -4101,7 +4092,7 @@
           <p:cNvPr id="5" name="テキスト ボックス 4">
             <a:extLst>
               <a:ext uri="{FF2B5EF4-FFF2-40B4-BE49-F238E27FC236}">
-                <a16:creationId xmlns:a16="http://schemas.microsoft.com/office/drawing/2014/main" id="{8F018780-214A-41ED-A2CB-36DB9187F625}"/>
+                <a16:creationId xmlns:a16="http://schemas.microsoft.com/office/drawing/2014/main" id="{5D543BD2-D6BF-4E76-2401-D59FD7504294}"/>
               </a:ext>
             </a:extLst>
           </p:cNvPr>
@@ -4148,7 +4139,7 @@
             <a:hlinkClick r:id="" action="ppaction://media"/>
             <a:extLst>
               <a:ext uri="{FF2B5EF4-FFF2-40B4-BE49-F238E27FC236}">
-                <a16:creationId xmlns:a16="http://schemas.microsoft.com/office/drawing/2014/main" id="{8E00BB58-E2D2-D023-CF3C-77A2D7096AF4}"/>
+                <a16:creationId xmlns:a16="http://schemas.microsoft.com/office/drawing/2014/main" id="{213B4AB9-2501-E186-B9D7-6196EF5CBC26}"/>
               </a:ext>
             </a:extLst>
           </p:cNvPr>
@@ -4183,7 +4174,7 @@
     </p:spTree>
     <p:extLst>
       <p:ext uri="{BB962C8B-B14F-4D97-AF65-F5344CB8AC3E}">
-        <p14:creationId xmlns:p14="http://schemas.microsoft.com/office/powerpoint/2010/main" val="3962681386"/>
+        <p14:creationId xmlns:p14="http://schemas.microsoft.com/office/powerpoint/2010/main" val="4061163564"/>
       </p:ext>
     </p:extLst>
   </p:cSld>
@@ -4307,7 +4298,7 @@
           <p:cNvPr id="2" name="テキスト ボックス 1">
             <a:extLst>
               <a:ext uri="{FF2B5EF4-FFF2-40B4-BE49-F238E27FC236}">
-                <a16:creationId xmlns:a16="http://schemas.microsoft.com/office/drawing/2014/main" id="{61F68439-8760-9F43-44F4-0462F290DDCD}"/>
+                <a16:creationId xmlns:a16="http://schemas.microsoft.com/office/drawing/2014/main" id="{ED8D5893-E079-40B3-B4C6-A37DA4A82846}"/>
               </a:ext>
             </a:extLst>
           </p:cNvPr>
@@ -4353,7 +4344,7 @@
           <p:cNvPr id="3" name="テキスト ボックス 2">
             <a:extLst>
               <a:ext uri="{FF2B5EF4-FFF2-40B4-BE49-F238E27FC236}">
-                <a16:creationId xmlns:a16="http://schemas.microsoft.com/office/drawing/2014/main" id="{47792817-B255-7673-8785-773DD89106B1}"/>
+                <a16:creationId xmlns:a16="http://schemas.microsoft.com/office/drawing/2014/main" id="{87A2E721-8EA1-A11D-E6A1-1B105D91F162}"/>
               </a:ext>
             </a:extLst>
           </p:cNvPr>
@@ -4377,20 +4368,14 @@
           <a:lstStyle/>
           <a:p>
             <a:r>
-              <a:rPr kumimoji="1" lang="en-US" altLang="ja-JP" sz="3400" b="1">
+              <a:rPr kumimoji="1" lang="ja-JP" altLang="en-US" sz="3400" b="1">
                 <a:solidFill>
                   <a:srgbClr val="111111"/>
                 </a:solidFill>
                 <a:latin typeface="Arial" panose="020B0604020202020204" pitchFamily="34" charset="0"/>
               </a:rPr>
-              <a:t>TECH STACK</a:t>
-            </a:r>
-            <a:endParaRPr kumimoji="1" lang="ja-JP" altLang="en-US" sz="3400" b="1">
-              <a:solidFill>
-                <a:srgbClr val="111111"/>
-              </a:solidFill>
-              <a:latin typeface="Arial" panose="020B0604020202020204" pitchFamily="34" charset="0"/>
-            </a:endParaRPr>
+              <a:t>技術スタック</a:t>
+            </a:r>
           </a:p>
         </p:txBody>
       </p:sp>
@@ -4399,7 +4384,7 @@
           <p:cNvPr id="4" name="テキスト ボックス 3">
             <a:extLst>
               <a:ext uri="{FF2B5EF4-FFF2-40B4-BE49-F238E27FC236}">
-                <a16:creationId xmlns:a16="http://schemas.microsoft.com/office/drawing/2014/main" id="{48FE4049-A3AF-0E6B-85DB-26C04998402C}"/>
+                <a16:creationId xmlns:a16="http://schemas.microsoft.com/office/drawing/2014/main" id="{E36F181B-766B-AA97-F3F4-C8B36E71E113}"/>
               </a:ext>
             </a:extLst>
           </p:cNvPr>
@@ -4409,7 +4394,7 @@
         <p:spPr>
           <a:xfrm>
             <a:off x="533400" y="3429000"/>
-            <a:ext cx="10795000" cy="400110"/>
+            <a:ext cx="10795000" cy="707886"/>
           </a:xfrm>
           <a:prstGeom prst="rect">
             <a:avLst/>
@@ -4423,13 +4408,22 @@
           <a:lstStyle/>
           <a:p>
             <a:r>
+              <a:rPr kumimoji="1" lang="ja-JP" altLang="en-US" sz="2000">
+                <a:solidFill>
+                  <a:srgbClr val="333333"/>
+                </a:solidFill>
+                <a:latin typeface="Arial" panose="020B0604020202020204" pitchFamily="34" charset="0"/>
+              </a:rPr>
+              <a:t>主要技術：</a:t>
+            </a:r>
+            <a:r>
               <a:rPr kumimoji="1" lang="en-US" altLang="ja-JP" sz="2000">
                 <a:solidFill>
                   <a:srgbClr val="333333"/>
                 </a:solidFill>
                 <a:latin typeface="Arial" panose="020B0604020202020204" pitchFamily="34" charset="0"/>
               </a:rPr>
-              <a:t>Primary technologies: TypeScript</a:t>
+              <a:t>TypeScript</a:t>
             </a:r>
             <a:r>
               <a:rPr kumimoji="1" lang="ja-JP" altLang="en-US" sz="2000">
@@ -4465,14 +4459,18 @@
                 </a:solidFill>
                 <a:latin typeface="Arial" panose="020B0604020202020204" pitchFamily="34" charset="0"/>
               </a:rPr>
-              <a:t>CSS</a:t>
-            </a:r>
-            <a:endParaRPr kumimoji="1" lang="ja-JP" altLang="en-US" sz="2000">
-              <a:solidFill>
-                <a:srgbClr val="333333"/>
-              </a:solidFill>
-              <a:latin typeface="Arial" panose="020B0604020202020204" pitchFamily="34" charset="0"/>
-            </a:endParaRPr>
+              <a:t>CSS
+</a:t>
+            </a:r>
+            <a:r>
+              <a:rPr kumimoji="1" lang="ja-JP" altLang="en-US" sz="2000">
+                <a:solidFill>
+                  <a:srgbClr val="333333"/>
+                </a:solidFill>
+                <a:latin typeface="Arial" panose="020B0604020202020204" pitchFamily="34" charset="0"/>
+              </a:rPr>
+              <a:t>役割を分け、保守しやすい構成を目指しています。</a:t>
+            </a:r>
           </a:p>
         </p:txBody>
       </p:sp>
@@ -4481,7 +4479,7 @@
           <p:cNvPr id="5" name="テキスト ボックス 4">
             <a:extLst>
               <a:ext uri="{FF2B5EF4-FFF2-40B4-BE49-F238E27FC236}">
-                <a16:creationId xmlns:a16="http://schemas.microsoft.com/office/drawing/2014/main" id="{D725AC0E-3AA4-F251-6698-0062E2AD6C0D}"/>
+                <a16:creationId xmlns:a16="http://schemas.microsoft.com/office/drawing/2014/main" id="{8A27A9A9-E9DD-4175-6E77-2F1F6586C9A4}"/>
               </a:ext>
             </a:extLst>
           </p:cNvPr>
@@ -4528,7 +4526,7 @@
             <a:hlinkClick r:id="" action="ppaction://media"/>
             <a:extLst>
               <a:ext uri="{FF2B5EF4-FFF2-40B4-BE49-F238E27FC236}">
-                <a16:creationId xmlns:a16="http://schemas.microsoft.com/office/drawing/2014/main" id="{906ECC65-3999-E2A6-2199-9C3A8FF4B903}"/>
+                <a16:creationId xmlns:a16="http://schemas.microsoft.com/office/drawing/2014/main" id="{12C3386C-E169-F00C-80B6-9161CA98EC74}"/>
               </a:ext>
             </a:extLst>
           </p:cNvPr>
@@ -4563,7 +4561,7 @@
     </p:spTree>
     <p:extLst>
       <p:ext uri="{BB962C8B-B14F-4D97-AF65-F5344CB8AC3E}">
-        <p14:creationId xmlns:p14="http://schemas.microsoft.com/office/powerpoint/2010/main" val="2934311058"/>
+        <p14:creationId xmlns:p14="http://schemas.microsoft.com/office/powerpoint/2010/main" val="1710219966"/>
       </p:ext>
     </p:extLst>
   </p:cSld>
@@ -4687,7 +4685,7 @@
           <p:cNvPr id="2" name="テキスト ボックス 1">
             <a:extLst>
               <a:ext uri="{FF2B5EF4-FFF2-40B4-BE49-F238E27FC236}">
-                <a16:creationId xmlns:a16="http://schemas.microsoft.com/office/drawing/2014/main" id="{DA40CF73-5CF1-695C-CF20-6F2107C8BB58}"/>
+                <a16:creationId xmlns:a16="http://schemas.microsoft.com/office/drawing/2014/main" id="{5EB816C7-541F-40C1-14EF-5A8863C3ACA2}"/>
               </a:ext>
             </a:extLst>
           </p:cNvPr>
@@ -4733,7 +4731,7 @@
           <p:cNvPr id="3" name="テキスト ボックス 2">
             <a:extLst>
               <a:ext uri="{FF2B5EF4-FFF2-40B4-BE49-F238E27FC236}">
-                <a16:creationId xmlns:a16="http://schemas.microsoft.com/office/drawing/2014/main" id="{3CEBB152-DE3F-1042-9E2C-3D70B2801CBC}"/>
+                <a16:creationId xmlns:a16="http://schemas.microsoft.com/office/drawing/2014/main" id="{534F3D65-5298-D452-80C6-471B6D73B0D4}"/>
               </a:ext>
             </a:extLst>
           </p:cNvPr>
@@ -4757,20 +4755,14 @@
           <a:lstStyle/>
           <a:p>
             <a:r>
-              <a:rPr kumimoji="1" lang="en-US" altLang="ja-JP" sz="3400" b="1">
+              <a:rPr kumimoji="1" lang="ja-JP" altLang="en-US" sz="3400" b="1">
                 <a:solidFill>
                   <a:srgbClr val="111111"/>
                 </a:solidFill>
                 <a:latin typeface="Arial" panose="020B0604020202020204" pitchFamily="34" charset="0"/>
               </a:rPr>
-              <a:t>REPOSITORY HIGHLIGHTS</a:t>
-            </a:r>
-            <a:endParaRPr kumimoji="1" lang="ja-JP" altLang="en-US" sz="3400" b="1">
-              <a:solidFill>
-                <a:srgbClr val="111111"/>
-              </a:solidFill>
-              <a:latin typeface="Arial" panose="020B0604020202020204" pitchFamily="34" charset="0"/>
-            </a:endParaRPr>
+              <a:t>リポジトリの読みどころ</a:t>
+            </a:r>
           </a:p>
         </p:txBody>
       </p:sp>
@@ -4779,7 +4771,7 @@
           <p:cNvPr id="4" name="テキスト ボックス 3">
             <a:extLst>
               <a:ext uri="{FF2B5EF4-FFF2-40B4-BE49-F238E27FC236}">
-                <a16:creationId xmlns:a16="http://schemas.microsoft.com/office/drawing/2014/main" id="{59F2E3ED-8771-60DC-8A8A-FA0A9FEEA487}"/>
+                <a16:creationId xmlns:a16="http://schemas.microsoft.com/office/drawing/2014/main" id="{4712BC01-09CF-098B-BE75-D849E0AFB9B8}"/>
               </a:ext>
             </a:extLst>
           </p:cNvPr>
@@ -4789,7 +4781,7 @@
         <p:spPr>
           <a:xfrm>
             <a:off x="533400" y="3429000"/>
-            <a:ext cx="10795000" cy="400110"/>
+            <a:ext cx="10795000" cy="707886"/>
           </a:xfrm>
           <a:prstGeom prst="rect">
             <a:avLst/>
@@ -4803,13 +4795,77 @@
           <a:lstStyle/>
           <a:p>
             <a:r>
+              <a:rPr kumimoji="1" lang="ja-JP" altLang="en-US" sz="2000">
+                <a:solidFill>
+                  <a:srgbClr val="333333"/>
+                </a:solidFill>
+                <a:latin typeface="Arial" panose="020B0604020202020204" pitchFamily="34" charset="0"/>
+              </a:rPr>
+              <a:t>公開コード、</a:t>
+            </a:r>
+            <a:r>
               <a:rPr kumimoji="1" lang="en-US" altLang="ja-JP" sz="2000">
                 <a:solidFill>
                   <a:srgbClr val="333333"/>
                 </a:solidFill>
                 <a:latin typeface="Arial" panose="020B0604020202020204" pitchFamily="34" charset="0"/>
               </a:rPr>
-              <a:t>Public source code, README and commit history reveal the design decisions.</a:t>
+              <a:t>README</a:t>
+            </a:r>
+            <a:r>
+              <a:rPr kumimoji="1" lang="ja-JP" altLang="en-US" sz="2000">
+                <a:solidFill>
+                  <a:srgbClr val="333333"/>
+                </a:solidFill>
+                <a:latin typeface="Arial" panose="020B0604020202020204" pitchFamily="34" charset="0"/>
+              </a:rPr>
+              <a:t>、コミット履歴から設計判断を確認できます。
+主なファイル：</a:t>
+            </a:r>
+            <a:r>
+              <a:rPr kumimoji="1" lang="en-US" altLang="ja-JP" sz="2000">
+                <a:solidFill>
+                  <a:srgbClr val="333333"/>
+                </a:solidFill>
+                <a:latin typeface="Arial" panose="020B0604020202020204" pitchFamily="34" charset="0"/>
+              </a:rPr>
+              <a:t>AGENTS.md</a:t>
+            </a:r>
+            <a:r>
+              <a:rPr kumimoji="1" lang="ja-JP" altLang="en-US" sz="2000">
+                <a:solidFill>
+                  <a:srgbClr val="333333"/>
+                </a:solidFill>
+                <a:latin typeface="Arial" panose="020B0604020202020204" pitchFamily="34" charset="0"/>
+              </a:rPr>
+              <a:t>、</a:t>
+            </a:r>
+            <a:r>
+              <a:rPr kumimoji="1" lang="en-US" altLang="ja-JP" sz="2000">
+                <a:solidFill>
+                  <a:srgbClr val="333333"/>
+                </a:solidFill>
+                <a:latin typeface="Arial" panose="020B0604020202020204" pitchFamily="34" charset="0"/>
+              </a:rPr>
+              <a:t>CLAUDE.md</a:t>
+            </a:r>
+            <a:r>
+              <a:rPr kumimoji="1" lang="ja-JP" altLang="en-US" sz="2000">
+                <a:solidFill>
+                  <a:srgbClr val="333333"/>
+                </a:solidFill>
+                <a:latin typeface="Arial" panose="020B0604020202020204" pitchFamily="34" charset="0"/>
+              </a:rPr>
+              <a:t>、</a:t>
+            </a:r>
+            <a:r>
+              <a:rPr kumimoji="1" lang="en-US" altLang="ja-JP" sz="2000">
+                <a:solidFill>
+                  <a:srgbClr val="333333"/>
+                </a:solidFill>
+                <a:latin typeface="Arial" panose="020B0604020202020204" pitchFamily="34" charset="0"/>
+              </a:rPr>
+              <a:t>README.md</a:t>
             </a:r>
             <a:endParaRPr kumimoji="1" lang="ja-JP" altLang="en-US" sz="2000">
               <a:solidFill>
@@ -4825,7 +4881,7 @@
           <p:cNvPr id="5" name="テキスト ボックス 4">
             <a:extLst>
               <a:ext uri="{FF2B5EF4-FFF2-40B4-BE49-F238E27FC236}">
-                <a16:creationId xmlns:a16="http://schemas.microsoft.com/office/drawing/2014/main" id="{6C672246-6002-1AE9-316A-BA094C29DB29}"/>
+                <a16:creationId xmlns:a16="http://schemas.microsoft.com/office/drawing/2014/main" id="{596DFBB5-BCA9-9C1D-02A9-32AA315B1E0E}"/>
               </a:ext>
             </a:extLst>
           </p:cNvPr>
@@ -4872,7 +4928,7 @@
             <a:hlinkClick r:id="" action="ppaction://media"/>
             <a:extLst>
               <a:ext uri="{FF2B5EF4-FFF2-40B4-BE49-F238E27FC236}">
-                <a16:creationId xmlns:a16="http://schemas.microsoft.com/office/drawing/2014/main" id="{1813F431-D27C-F2CE-7C0F-0E4DCE085D5D}"/>
+                <a16:creationId xmlns:a16="http://schemas.microsoft.com/office/drawing/2014/main" id="{D8DA8DA5-AC88-18FC-BFC9-62FB42E322FE}"/>
               </a:ext>
             </a:extLst>
           </p:cNvPr>
@@ -4907,7 +4963,7 @@
     </p:spTree>
     <p:extLst>
       <p:ext uri="{BB962C8B-B14F-4D97-AF65-F5344CB8AC3E}">
-        <p14:creationId xmlns:p14="http://schemas.microsoft.com/office/powerpoint/2010/main" val="2468516127"/>
+        <p14:creationId xmlns:p14="http://schemas.microsoft.com/office/powerpoint/2010/main" val="1788880337"/>
       </p:ext>
     </p:extLst>
   </p:cSld>
@@ -5031,7 +5087,7 @@
           <p:cNvPr id="2" name="テキスト ボックス 1">
             <a:extLst>
               <a:ext uri="{FF2B5EF4-FFF2-40B4-BE49-F238E27FC236}">
-                <a16:creationId xmlns:a16="http://schemas.microsoft.com/office/drawing/2014/main" id="{3C24B52B-120E-6F40-C475-DD7E455BA3AE}"/>
+                <a16:creationId xmlns:a16="http://schemas.microsoft.com/office/drawing/2014/main" id="{D6826490-193D-4F42-AAA9-6D67555DAE34}"/>
               </a:ext>
             </a:extLst>
           </p:cNvPr>
@@ -5077,7 +5133,7 @@
           <p:cNvPr id="3" name="テキスト ボックス 2">
             <a:extLst>
               <a:ext uri="{FF2B5EF4-FFF2-40B4-BE49-F238E27FC236}">
-                <a16:creationId xmlns:a16="http://schemas.microsoft.com/office/drawing/2014/main" id="{E1EE9EFE-D12A-FF47-69CD-79838BBFE352}"/>
+                <a16:creationId xmlns:a16="http://schemas.microsoft.com/office/drawing/2014/main" id="{AEAE40A8-390B-4407-A73D-78D8428A14EC}"/>
               </a:ext>
             </a:extLst>
           </p:cNvPr>
@@ -5101,20 +5157,14 @@
           <a:lstStyle/>
           <a:p>
             <a:r>
-              <a:rPr kumimoji="1" lang="en-US" altLang="ja-JP" sz="3400" b="1">
+              <a:rPr kumimoji="1" lang="ja-JP" altLang="en-US" sz="3400" b="1">
                 <a:solidFill>
                   <a:srgbClr val="111111"/>
                 </a:solidFill>
                 <a:latin typeface="Arial" panose="020B0604020202020204" pitchFamily="34" charset="0"/>
               </a:rPr>
-              <a:t>ITERATIVE IMPROVEMENT</a:t>
-            </a:r>
-            <a:endParaRPr kumimoji="1" lang="ja-JP" altLang="en-US" sz="3400" b="1">
-              <a:solidFill>
-                <a:srgbClr val="111111"/>
-              </a:solidFill>
-              <a:latin typeface="Arial" panose="020B0604020202020204" pitchFamily="34" charset="0"/>
-            </a:endParaRPr>
+              <a:t>コミットから分かる改善</a:t>
+            </a:r>
           </a:p>
         </p:txBody>
       </p:sp>
@@ -5123,7 +5173,7 @@
           <p:cNvPr id="4" name="テキスト ボックス 3">
             <a:extLst>
               <a:ext uri="{FF2B5EF4-FFF2-40B4-BE49-F238E27FC236}">
-                <a16:creationId xmlns:a16="http://schemas.microsoft.com/office/drawing/2014/main" id="{68723048-976E-D7D5-20B3-28F63C623AD9}"/>
+                <a16:creationId xmlns:a16="http://schemas.microsoft.com/office/drawing/2014/main" id="{3133E7B3-C888-0BCC-0C46-959D103B9CE6}"/>
               </a:ext>
             </a:extLst>
           </p:cNvPr>
@@ -5153,7 +5203,7 @@
                 </a:solidFill>
                 <a:latin typeface="Arial" panose="020B0604020202020204" pitchFamily="34" charset="0"/>
               </a:rPr>
-              <a:t>Small commits continuously improve features, quality and release readiness.</a:t>
+              <a:t>Initial multi-tenant reservation system MVP</a:t>
             </a:r>
             <a:endParaRPr kumimoji="1" lang="ja-JP" altLang="en-US" sz="2000">
               <a:solidFill>
@@ -5169,7 +5219,7 @@
           <p:cNvPr id="5" name="テキスト ボックス 4">
             <a:extLst>
               <a:ext uri="{FF2B5EF4-FFF2-40B4-BE49-F238E27FC236}">
-                <a16:creationId xmlns:a16="http://schemas.microsoft.com/office/drawing/2014/main" id="{19466CE0-C9AA-CF10-14F7-6B2BFA1AD682}"/>
+                <a16:creationId xmlns:a16="http://schemas.microsoft.com/office/drawing/2014/main" id="{0F217A9E-A0AC-FF95-8BA5-7A95C7753DE9}"/>
               </a:ext>
             </a:extLst>
           </p:cNvPr>
@@ -5216,7 +5266,7 @@
             <a:hlinkClick r:id="" action="ppaction://media"/>
             <a:extLst>
               <a:ext uri="{FF2B5EF4-FFF2-40B4-BE49-F238E27FC236}">
-                <a16:creationId xmlns:a16="http://schemas.microsoft.com/office/drawing/2014/main" id="{AC0BA102-086D-8E71-F524-FEAA74EF8906}"/>
+                <a16:creationId xmlns:a16="http://schemas.microsoft.com/office/drawing/2014/main" id="{8FA1CBD0-095E-C926-E778-C9BE88F8E3BE}"/>
               </a:ext>
             </a:extLst>
           </p:cNvPr>
@@ -5251,7 +5301,7 @@
     </p:spTree>
     <p:extLst>
       <p:ext uri="{BB962C8B-B14F-4D97-AF65-F5344CB8AC3E}">
-        <p14:creationId xmlns:p14="http://schemas.microsoft.com/office/powerpoint/2010/main" val="2733859705"/>
+        <p14:creationId xmlns:p14="http://schemas.microsoft.com/office/powerpoint/2010/main" val="3530275594"/>
       </p:ext>
     </p:extLst>
   </p:cSld>
@@ -5375,7 +5425,7 @@
           <p:cNvPr id="2" name="テキスト ボックス 1">
             <a:extLst>
               <a:ext uri="{FF2B5EF4-FFF2-40B4-BE49-F238E27FC236}">
-                <a16:creationId xmlns:a16="http://schemas.microsoft.com/office/drawing/2014/main" id="{171C2D60-A869-4641-F008-62A9B0F867AA}"/>
+                <a16:creationId xmlns:a16="http://schemas.microsoft.com/office/drawing/2014/main" id="{AB22BAB6-76BD-6AA4-9925-788A92C5E6B2}"/>
               </a:ext>
             </a:extLst>
           </p:cNvPr>
@@ -5421,7 +5471,7 @@
           <p:cNvPr id="3" name="テキスト ボックス 2">
             <a:extLst>
               <a:ext uri="{FF2B5EF4-FFF2-40B4-BE49-F238E27FC236}">
-                <a16:creationId xmlns:a16="http://schemas.microsoft.com/office/drawing/2014/main" id="{1FAD0F98-77D4-7532-1170-5ED759AF0A1E}"/>
+                <a16:creationId xmlns:a16="http://schemas.microsoft.com/office/drawing/2014/main" id="{6FE9A86E-F886-11FA-3F7B-A02B782848B2}"/>
               </a:ext>
             </a:extLst>
           </p:cNvPr>
@@ -5445,20 +5495,14 @@
           <a:lstStyle/>
           <a:p>
             <a:r>
-              <a:rPr kumimoji="1" lang="en-US" altLang="ja-JP" sz="3400" b="1">
+              <a:rPr kumimoji="1" lang="ja-JP" altLang="en-US" sz="3400" b="1">
                 <a:solidFill>
                   <a:srgbClr val="111111"/>
                 </a:solidFill>
                 <a:latin typeface="Arial" panose="020B0604020202020204" pitchFamily="34" charset="0"/>
               </a:rPr>
-              <a:t>READ THE FULL ARTICLE</a:t>
-            </a:r>
-            <a:endParaRPr kumimoji="1" lang="ja-JP" altLang="en-US" sz="3400" b="1">
-              <a:solidFill>
-                <a:srgbClr val="111111"/>
-              </a:solidFill>
-              <a:latin typeface="Arial" panose="020B0604020202020204" pitchFamily="34" charset="0"/>
-            </a:endParaRPr>
+              <a:t>詳しくは積み上げログへ</a:t>
+            </a:r>
           </a:p>
         </p:txBody>
       </p:sp>
@@ -5467,7 +5511,7 @@
           <p:cNvPr id="4" name="テキスト ボックス 3">
             <a:extLst>
               <a:ext uri="{FF2B5EF4-FFF2-40B4-BE49-F238E27FC236}">
-                <a16:creationId xmlns:a16="http://schemas.microsoft.com/office/drawing/2014/main" id="{9B578D2D-68CC-9BB0-1A80-3BE4EFB67B9E}"/>
+                <a16:creationId xmlns:a16="http://schemas.microsoft.com/office/drawing/2014/main" id="{AA13F1C7-5AB6-B29E-09AC-ABA91AE9B6BF}"/>
               </a:ext>
             </a:extLst>
           </p:cNvPr>
@@ -5491,14 +5535,32 @@
           <a:lstStyle/>
           <a:p>
             <a:r>
-              <a:rPr kumimoji="1" lang="sv-SE" altLang="ja-JP" sz="2000">
+              <a:rPr kumimoji="1" lang="zh-TW" altLang="en-US" sz="2000">
+                <a:solidFill>
+                  <a:srgbClr val="333333"/>
+                </a:solidFill>
+                <a:latin typeface="Arial" panose="020B0604020202020204" pitchFamily="34" charset="0"/>
+              </a:rPr>
+              <a:t>記事： </a:t>
+            </a:r>
+            <a:r>
+              <a:rPr kumimoji="1" lang="en-US" altLang="zh-TW" sz="2000">
                 <a:solidFill>
                   <a:srgbClr val="333333"/>
                 </a:solidFill>
                 <a:latin typeface="Arial" panose="020B0604020202020204" pitchFamily="34" charset="0"/>
               </a:rPr>
               <a:t>https://syunnjack.dev/articles/reserve-sys
-TSUMIAGE LOG</a:t>
+</a:t>
+            </a:r>
+            <a:r>
+              <a:rPr kumimoji="1" lang="zh-TW" altLang="en-US" sz="2000">
+                <a:solidFill>
+                  <a:srgbClr val="333333"/>
+                </a:solidFill>
+                <a:latin typeface="Arial" panose="020B0604020202020204" pitchFamily="34" charset="0"/>
+              </a:rPr>
+              <a:t>学び、作り、振り返る開発記録。</a:t>
             </a:r>
             <a:endParaRPr kumimoji="1" lang="ja-JP" altLang="en-US" sz="2000">
               <a:solidFill>
@@ -5514,7 +5576,7 @@
           <p:cNvPr id="5" name="テキスト ボックス 4">
             <a:extLst>
               <a:ext uri="{FF2B5EF4-FFF2-40B4-BE49-F238E27FC236}">
-                <a16:creationId xmlns:a16="http://schemas.microsoft.com/office/drawing/2014/main" id="{C32F59F8-6035-8431-4345-E7BEB4D460A5}"/>
+                <a16:creationId xmlns:a16="http://schemas.microsoft.com/office/drawing/2014/main" id="{06F3B3CE-9F95-3D01-1BFB-B95E4C9C7C26}"/>
               </a:ext>
             </a:extLst>
           </p:cNvPr>
@@ -5561,7 +5623,7 @@
             <a:hlinkClick r:id="" action="ppaction://media"/>
             <a:extLst>
               <a:ext uri="{FF2B5EF4-FFF2-40B4-BE49-F238E27FC236}">
-                <a16:creationId xmlns:a16="http://schemas.microsoft.com/office/drawing/2014/main" id="{88D730A3-6D70-48D5-5384-4351C123E86F}"/>
+                <a16:creationId xmlns:a16="http://schemas.microsoft.com/office/drawing/2014/main" id="{52C27C96-4E91-BB96-8788-03CD0ACAA73B}"/>
               </a:ext>
             </a:extLst>
           </p:cNvPr>
@@ -5596,7 +5658,7 @@
     </p:spTree>
     <p:extLst>
       <p:ext uri="{BB962C8B-B14F-4D97-AF65-F5344CB8AC3E}">
-        <p14:creationId xmlns:p14="http://schemas.microsoft.com/office/powerpoint/2010/main" val="3440478477"/>
+        <p14:creationId xmlns:p14="http://schemas.microsoft.com/office/powerpoint/2010/main" val="2202240329"/>
       </p:ext>
     </p:extLst>
   </p:cSld>

--- a/public/videos/repositories/reserve-sys/reserve-sys-tech-preview.pptx
+++ b/public/videos/repositories/reserve-sys/reserve-sys-tech-preview.pptx
@@ -134,7 +134,7 @@
           <p:cNvPr id="2" name="タイトル 1">
             <a:extLst>
               <a:ext uri="{FF2B5EF4-FFF2-40B4-BE49-F238E27FC236}">
-                <a16:creationId xmlns:a16="http://schemas.microsoft.com/office/drawing/2014/main" id="{A136B881-D23A-7EDE-D3A7-A3DA450067B3}"/>
+                <a16:creationId xmlns:a16="http://schemas.microsoft.com/office/drawing/2014/main" id="{1A5870FB-4A91-7651-5946-CE43B3277746}"/>
               </a:ext>
             </a:extLst>
           </p:cNvPr>
@@ -171,7 +171,7 @@
           <p:cNvPr id="3" name="字幕 2">
             <a:extLst>
               <a:ext uri="{FF2B5EF4-FFF2-40B4-BE49-F238E27FC236}">
-                <a16:creationId xmlns:a16="http://schemas.microsoft.com/office/drawing/2014/main" id="{C6006623-06BE-F463-70E5-11AF0C03C1DA}"/>
+                <a16:creationId xmlns:a16="http://schemas.microsoft.com/office/drawing/2014/main" id="{6C57ED1F-C03D-C14F-0E17-DD49793D2C0D}"/>
               </a:ext>
             </a:extLst>
           </p:cNvPr>
@@ -241,7 +241,7 @@
           <p:cNvPr id="4" name="日付プレースホルダー 3">
             <a:extLst>
               <a:ext uri="{FF2B5EF4-FFF2-40B4-BE49-F238E27FC236}">
-                <a16:creationId xmlns:a16="http://schemas.microsoft.com/office/drawing/2014/main" id="{415227C6-5D57-58F3-6F3C-25ADB1B42CA9}"/>
+                <a16:creationId xmlns:a16="http://schemas.microsoft.com/office/drawing/2014/main" id="{9A74D313-7E43-C563-E003-236D96D22C45}"/>
               </a:ext>
             </a:extLst>
           </p:cNvPr>
@@ -257,7 +257,7 @@
           <a:bodyPr/>
           <a:lstStyle/>
           <a:p>
-            <a:fld id="{AD7F3C31-AADC-421A-A3BA-3DA6E648B9CB}" type="datetimeFigureOut">
+            <a:fld id="{585CCA5C-7CC9-4869-820C-4AF759F38EEA}" type="datetimeFigureOut">
               <a:rPr kumimoji="1" lang="ja-JP" altLang="en-US" smtClean="0"/>
               <a:t>2026/7/30</a:t>
             </a:fld>
@@ -270,7 +270,7 @@
           <p:cNvPr id="5" name="フッター プレースホルダー 4">
             <a:extLst>
               <a:ext uri="{FF2B5EF4-FFF2-40B4-BE49-F238E27FC236}">
-                <a16:creationId xmlns:a16="http://schemas.microsoft.com/office/drawing/2014/main" id="{018F7347-4B62-3A21-A898-7F75FFC0BF05}"/>
+                <a16:creationId xmlns:a16="http://schemas.microsoft.com/office/drawing/2014/main" id="{66DA0284-89C0-428B-00DB-6F133472B140}"/>
               </a:ext>
             </a:extLst>
           </p:cNvPr>
@@ -295,7 +295,7 @@
           <p:cNvPr id="6" name="スライド番号プレースホルダー 5">
             <a:extLst>
               <a:ext uri="{FF2B5EF4-FFF2-40B4-BE49-F238E27FC236}">
-                <a16:creationId xmlns:a16="http://schemas.microsoft.com/office/drawing/2014/main" id="{746AED18-652D-A86D-B2B1-1B62F78EE2DA}"/>
+                <a16:creationId xmlns:a16="http://schemas.microsoft.com/office/drawing/2014/main" id="{0F4C104C-681A-9E51-DC21-5D9F580E796E}"/>
               </a:ext>
             </a:extLst>
           </p:cNvPr>
@@ -311,7 +311,7 @@
           <a:bodyPr/>
           <a:lstStyle/>
           <a:p>
-            <a:fld id="{1C22CFA1-0640-430D-AC4F-C2F08AD884EE}" type="slidenum">
+            <a:fld id="{EC3ABCF7-C4B6-4433-AADA-1C1D6E37E2FE}" type="slidenum">
               <a:rPr kumimoji="1" lang="ja-JP" altLang="en-US" smtClean="0"/>
               <a:t>‹#›</a:t>
             </a:fld>
@@ -322,7 +322,7 @@
     </p:spTree>
     <p:extLst>
       <p:ext uri="{BB962C8B-B14F-4D97-AF65-F5344CB8AC3E}">
-        <p14:creationId xmlns:p14="http://schemas.microsoft.com/office/powerpoint/2010/main" val="2871067274"/>
+        <p14:creationId xmlns:p14="http://schemas.microsoft.com/office/powerpoint/2010/main" val="1232541055"/>
       </p:ext>
     </p:extLst>
   </p:cSld>
@@ -354,7 +354,7 @@
           <p:cNvPr id="2" name="タイトル 1">
             <a:extLst>
               <a:ext uri="{FF2B5EF4-FFF2-40B4-BE49-F238E27FC236}">
-                <a16:creationId xmlns:a16="http://schemas.microsoft.com/office/drawing/2014/main" id="{B68D25B2-67DC-3A53-D98C-873B087B565D}"/>
+                <a16:creationId xmlns:a16="http://schemas.microsoft.com/office/drawing/2014/main" id="{4D5D4949-FFBB-60B1-8B25-6ED8632E5969}"/>
               </a:ext>
             </a:extLst>
           </p:cNvPr>
@@ -382,7 +382,7 @@
           <p:cNvPr id="3" name="縦書きテキスト プレースホルダー 2">
             <a:extLst>
               <a:ext uri="{FF2B5EF4-FFF2-40B4-BE49-F238E27FC236}">
-                <a16:creationId xmlns:a16="http://schemas.microsoft.com/office/drawing/2014/main" id="{DE35CD33-7C82-7E10-E2AD-3B8AB9F237E7}"/>
+                <a16:creationId xmlns:a16="http://schemas.microsoft.com/office/drawing/2014/main" id="{2697D711-6716-E4AD-555F-3BE9A11E862A}"/>
               </a:ext>
             </a:extLst>
           </p:cNvPr>
@@ -471,7 +471,7 @@
           <p:cNvPr id="4" name="日付プレースホルダー 3">
             <a:extLst>
               <a:ext uri="{FF2B5EF4-FFF2-40B4-BE49-F238E27FC236}">
-                <a16:creationId xmlns:a16="http://schemas.microsoft.com/office/drawing/2014/main" id="{2C065DCC-5B3F-A4F5-1DA3-8A965722B9DD}"/>
+                <a16:creationId xmlns:a16="http://schemas.microsoft.com/office/drawing/2014/main" id="{654F7C0A-2DB5-CAA8-F68A-6E497CBC0228}"/>
               </a:ext>
             </a:extLst>
           </p:cNvPr>
@@ -487,7 +487,7 @@
           <a:bodyPr/>
           <a:lstStyle/>
           <a:p>
-            <a:fld id="{AD7F3C31-AADC-421A-A3BA-3DA6E648B9CB}" type="datetimeFigureOut">
+            <a:fld id="{585CCA5C-7CC9-4869-820C-4AF759F38EEA}" type="datetimeFigureOut">
               <a:rPr kumimoji="1" lang="ja-JP" altLang="en-US" smtClean="0"/>
               <a:t>2026/7/30</a:t>
             </a:fld>
@@ -500,7 +500,7 @@
           <p:cNvPr id="5" name="フッター プレースホルダー 4">
             <a:extLst>
               <a:ext uri="{FF2B5EF4-FFF2-40B4-BE49-F238E27FC236}">
-                <a16:creationId xmlns:a16="http://schemas.microsoft.com/office/drawing/2014/main" id="{D8F04D95-664E-F16E-2135-628A01806364}"/>
+                <a16:creationId xmlns:a16="http://schemas.microsoft.com/office/drawing/2014/main" id="{758F2D3C-F486-1DC3-01F2-CBDD4A31DD61}"/>
               </a:ext>
             </a:extLst>
           </p:cNvPr>
@@ -525,7 +525,7 @@
           <p:cNvPr id="6" name="スライド番号プレースホルダー 5">
             <a:extLst>
               <a:ext uri="{FF2B5EF4-FFF2-40B4-BE49-F238E27FC236}">
-                <a16:creationId xmlns:a16="http://schemas.microsoft.com/office/drawing/2014/main" id="{F9231DDD-26CA-AA83-DF6D-D4BFA0555D76}"/>
+                <a16:creationId xmlns:a16="http://schemas.microsoft.com/office/drawing/2014/main" id="{11EC8978-4553-63C1-E133-EE2B209E73FA}"/>
               </a:ext>
             </a:extLst>
           </p:cNvPr>
@@ -541,7 +541,7 @@
           <a:bodyPr/>
           <a:lstStyle/>
           <a:p>
-            <a:fld id="{1C22CFA1-0640-430D-AC4F-C2F08AD884EE}" type="slidenum">
+            <a:fld id="{EC3ABCF7-C4B6-4433-AADA-1C1D6E37E2FE}" type="slidenum">
               <a:rPr kumimoji="1" lang="ja-JP" altLang="en-US" smtClean="0"/>
               <a:t>‹#›</a:t>
             </a:fld>
@@ -552,7 +552,7 @@
     </p:spTree>
     <p:extLst>
       <p:ext uri="{BB962C8B-B14F-4D97-AF65-F5344CB8AC3E}">
-        <p14:creationId xmlns:p14="http://schemas.microsoft.com/office/powerpoint/2010/main" val="3858170942"/>
+        <p14:creationId xmlns:p14="http://schemas.microsoft.com/office/powerpoint/2010/main" val="2272180982"/>
       </p:ext>
     </p:extLst>
   </p:cSld>
@@ -584,7 +584,7 @@
           <p:cNvPr id="2" name="縦書きタイトル 1">
             <a:extLst>
               <a:ext uri="{FF2B5EF4-FFF2-40B4-BE49-F238E27FC236}">
-                <a16:creationId xmlns:a16="http://schemas.microsoft.com/office/drawing/2014/main" id="{80F27238-708A-D3CC-911F-160C7E682F3A}"/>
+                <a16:creationId xmlns:a16="http://schemas.microsoft.com/office/drawing/2014/main" id="{EA3973F4-2DC4-7EB9-DA32-C4A43B271D5E}"/>
               </a:ext>
             </a:extLst>
           </p:cNvPr>
@@ -617,7 +617,7 @@
           <p:cNvPr id="3" name="縦書きテキスト プレースホルダー 2">
             <a:extLst>
               <a:ext uri="{FF2B5EF4-FFF2-40B4-BE49-F238E27FC236}">
-                <a16:creationId xmlns:a16="http://schemas.microsoft.com/office/drawing/2014/main" id="{D4F2574D-9040-DD0B-8BAC-75C17643E0DF}"/>
+                <a16:creationId xmlns:a16="http://schemas.microsoft.com/office/drawing/2014/main" id="{EDE2258F-1C71-873D-5C6A-0FE3C4E616F1}"/>
               </a:ext>
             </a:extLst>
           </p:cNvPr>
@@ -711,7 +711,7 @@
           <p:cNvPr id="4" name="日付プレースホルダー 3">
             <a:extLst>
               <a:ext uri="{FF2B5EF4-FFF2-40B4-BE49-F238E27FC236}">
-                <a16:creationId xmlns:a16="http://schemas.microsoft.com/office/drawing/2014/main" id="{4DA37DAC-50DC-36C3-D501-ED70237601A2}"/>
+                <a16:creationId xmlns:a16="http://schemas.microsoft.com/office/drawing/2014/main" id="{92333647-5AFF-A890-4BCE-B98F12F6D458}"/>
               </a:ext>
             </a:extLst>
           </p:cNvPr>
@@ -727,7 +727,7 @@
           <a:bodyPr/>
           <a:lstStyle/>
           <a:p>
-            <a:fld id="{AD7F3C31-AADC-421A-A3BA-3DA6E648B9CB}" type="datetimeFigureOut">
+            <a:fld id="{585CCA5C-7CC9-4869-820C-4AF759F38EEA}" type="datetimeFigureOut">
               <a:rPr kumimoji="1" lang="ja-JP" altLang="en-US" smtClean="0"/>
               <a:t>2026/7/30</a:t>
             </a:fld>
@@ -740,7 +740,7 @@
           <p:cNvPr id="5" name="フッター プレースホルダー 4">
             <a:extLst>
               <a:ext uri="{FF2B5EF4-FFF2-40B4-BE49-F238E27FC236}">
-                <a16:creationId xmlns:a16="http://schemas.microsoft.com/office/drawing/2014/main" id="{C3A8085F-6BA4-E131-C9B6-A814247F46CC}"/>
+                <a16:creationId xmlns:a16="http://schemas.microsoft.com/office/drawing/2014/main" id="{A3045D03-7EFB-8A31-19B6-9808DB94BAD8}"/>
               </a:ext>
             </a:extLst>
           </p:cNvPr>
@@ -765,7 +765,7 @@
           <p:cNvPr id="6" name="スライド番号プレースホルダー 5">
             <a:extLst>
               <a:ext uri="{FF2B5EF4-FFF2-40B4-BE49-F238E27FC236}">
-                <a16:creationId xmlns:a16="http://schemas.microsoft.com/office/drawing/2014/main" id="{7B9D01CF-5303-5C06-00D0-AF0BDDA172AC}"/>
+                <a16:creationId xmlns:a16="http://schemas.microsoft.com/office/drawing/2014/main" id="{83928126-C7B9-DB1F-B6F9-925927FCC1F4}"/>
               </a:ext>
             </a:extLst>
           </p:cNvPr>
@@ -781,7 +781,7 @@
           <a:bodyPr/>
           <a:lstStyle/>
           <a:p>
-            <a:fld id="{1C22CFA1-0640-430D-AC4F-C2F08AD884EE}" type="slidenum">
+            <a:fld id="{EC3ABCF7-C4B6-4433-AADA-1C1D6E37E2FE}" type="slidenum">
               <a:rPr kumimoji="1" lang="ja-JP" altLang="en-US" smtClean="0"/>
               <a:t>‹#›</a:t>
             </a:fld>
@@ -792,7 +792,7 @@
     </p:spTree>
     <p:extLst>
       <p:ext uri="{BB962C8B-B14F-4D97-AF65-F5344CB8AC3E}">
-        <p14:creationId xmlns:p14="http://schemas.microsoft.com/office/powerpoint/2010/main" val="4172684345"/>
+        <p14:creationId xmlns:p14="http://schemas.microsoft.com/office/powerpoint/2010/main" val="1013516905"/>
       </p:ext>
     </p:extLst>
   </p:cSld>
@@ -824,7 +824,7 @@
           <p:cNvPr id="2" name="タイトル 1">
             <a:extLst>
               <a:ext uri="{FF2B5EF4-FFF2-40B4-BE49-F238E27FC236}">
-                <a16:creationId xmlns:a16="http://schemas.microsoft.com/office/drawing/2014/main" id="{10EE72A9-7AFA-FFAC-36BD-1A455DAAE081}"/>
+                <a16:creationId xmlns:a16="http://schemas.microsoft.com/office/drawing/2014/main" id="{F88691FA-9699-A358-9A4A-1E0A1979ED9C}"/>
               </a:ext>
             </a:extLst>
           </p:cNvPr>
@@ -852,7 +852,7 @@
           <p:cNvPr id="3" name="コンテンツ プレースホルダー 2">
             <a:extLst>
               <a:ext uri="{FF2B5EF4-FFF2-40B4-BE49-F238E27FC236}">
-                <a16:creationId xmlns:a16="http://schemas.microsoft.com/office/drawing/2014/main" id="{55A321FF-D7FD-5F8F-7F23-8CE37154E729}"/>
+                <a16:creationId xmlns:a16="http://schemas.microsoft.com/office/drawing/2014/main" id="{BF031418-E5DA-47E8-322F-CDFF362A748E}"/>
               </a:ext>
             </a:extLst>
           </p:cNvPr>
@@ -941,7 +941,7 @@
           <p:cNvPr id="4" name="日付プレースホルダー 3">
             <a:extLst>
               <a:ext uri="{FF2B5EF4-FFF2-40B4-BE49-F238E27FC236}">
-                <a16:creationId xmlns:a16="http://schemas.microsoft.com/office/drawing/2014/main" id="{DFDBFB61-82CA-3290-743D-7C2BB579ED77}"/>
+                <a16:creationId xmlns:a16="http://schemas.microsoft.com/office/drawing/2014/main" id="{8DBF577F-D4EE-F659-18F0-0A6A0AF7988C}"/>
               </a:ext>
             </a:extLst>
           </p:cNvPr>
@@ -957,7 +957,7 @@
           <a:bodyPr/>
           <a:lstStyle/>
           <a:p>
-            <a:fld id="{AD7F3C31-AADC-421A-A3BA-3DA6E648B9CB}" type="datetimeFigureOut">
+            <a:fld id="{585CCA5C-7CC9-4869-820C-4AF759F38EEA}" type="datetimeFigureOut">
               <a:rPr kumimoji="1" lang="ja-JP" altLang="en-US" smtClean="0"/>
               <a:t>2026/7/30</a:t>
             </a:fld>
@@ -970,7 +970,7 @@
           <p:cNvPr id="5" name="フッター プレースホルダー 4">
             <a:extLst>
               <a:ext uri="{FF2B5EF4-FFF2-40B4-BE49-F238E27FC236}">
-                <a16:creationId xmlns:a16="http://schemas.microsoft.com/office/drawing/2014/main" id="{F065BADA-08DB-2D74-30E1-F150CE49C8AA}"/>
+                <a16:creationId xmlns:a16="http://schemas.microsoft.com/office/drawing/2014/main" id="{A10FFCDC-D8CB-7F8E-41AB-001217B61BAF}"/>
               </a:ext>
             </a:extLst>
           </p:cNvPr>
@@ -995,7 +995,7 @@
           <p:cNvPr id="6" name="スライド番号プレースホルダー 5">
             <a:extLst>
               <a:ext uri="{FF2B5EF4-FFF2-40B4-BE49-F238E27FC236}">
-                <a16:creationId xmlns:a16="http://schemas.microsoft.com/office/drawing/2014/main" id="{F3E70D9B-B51E-CC42-748D-89296687A2AD}"/>
+                <a16:creationId xmlns:a16="http://schemas.microsoft.com/office/drawing/2014/main" id="{C1F026C8-E52A-83B9-B2D0-E6D306F8873D}"/>
               </a:ext>
             </a:extLst>
           </p:cNvPr>
@@ -1011,7 +1011,7 @@
           <a:bodyPr/>
           <a:lstStyle/>
           <a:p>
-            <a:fld id="{1C22CFA1-0640-430D-AC4F-C2F08AD884EE}" type="slidenum">
+            <a:fld id="{EC3ABCF7-C4B6-4433-AADA-1C1D6E37E2FE}" type="slidenum">
               <a:rPr kumimoji="1" lang="ja-JP" altLang="en-US" smtClean="0"/>
               <a:t>‹#›</a:t>
             </a:fld>
@@ -1022,7 +1022,7 @@
     </p:spTree>
     <p:extLst>
       <p:ext uri="{BB962C8B-B14F-4D97-AF65-F5344CB8AC3E}">
-        <p14:creationId xmlns:p14="http://schemas.microsoft.com/office/powerpoint/2010/main" val="2488547458"/>
+        <p14:creationId xmlns:p14="http://schemas.microsoft.com/office/powerpoint/2010/main" val="1891485338"/>
       </p:ext>
     </p:extLst>
   </p:cSld>
@@ -1054,7 +1054,7 @@
           <p:cNvPr id="2" name="タイトル 1">
             <a:extLst>
               <a:ext uri="{FF2B5EF4-FFF2-40B4-BE49-F238E27FC236}">
-                <a16:creationId xmlns:a16="http://schemas.microsoft.com/office/drawing/2014/main" id="{49DED08E-E9D6-3B80-3C49-A73772BC6612}"/>
+                <a16:creationId xmlns:a16="http://schemas.microsoft.com/office/drawing/2014/main" id="{78360E36-30A2-4293-7C5C-454195BD783D}"/>
               </a:ext>
             </a:extLst>
           </p:cNvPr>
@@ -1091,7 +1091,7 @@
           <p:cNvPr id="3" name="テキスト プレースホルダー 2">
             <a:extLst>
               <a:ext uri="{FF2B5EF4-FFF2-40B4-BE49-F238E27FC236}">
-                <a16:creationId xmlns:a16="http://schemas.microsoft.com/office/drawing/2014/main" id="{13D3B579-373A-FEAB-DCD4-81802EA614E9}"/>
+                <a16:creationId xmlns:a16="http://schemas.microsoft.com/office/drawing/2014/main" id="{EBC6824C-4AFC-8D69-8CE7-B420963BFBE9}"/>
               </a:ext>
             </a:extLst>
           </p:cNvPr>
@@ -1216,7 +1216,7 @@
           <p:cNvPr id="4" name="日付プレースホルダー 3">
             <a:extLst>
               <a:ext uri="{FF2B5EF4-FFF2-40B4-BE49-F238E27FC236}">
-                <a16:creationId xmlns:a16="http://schemas.microsoft.com/office/drawing/2014/main" id="{5E6D98C8-B845-9249-61F2-246AE6D090E1}"/>
+                <a16:creationId xmlns:a16="http://schemas.microsoft.com/office/drawing/2014/main" id="{C90BCF1A-FFC4-73A7-CF84-7229AE21F426}"/>
               </a:ext>
             </a:extLst>
           </p:cNvPr>
@@ -1232,7 +1232,7 @@
           <a:bodyPr/>
           <a:lstStyle/>
           <a:p>
-            <a:fld id="{AD7F3C31-AADC-421A-A3BA-3DA6E648B9CB}" type="datetimeFigureOut">
+            <a:fld id="{585CCA5C-7CC9-4869-820C-4AF759F38EEA}" type="datetimeFigureOut">
               <a:rPr kumimoji="1" lang="ja-JP" altLang="en-US" smtClean="0"/>
               <a:t>2026/7/30</a:t>
             </a:fld>
@@ -1245,7 +1245,7 @@
           <p:cNvPr id="5" name="フッター プレースホルダー 4">
             <a:extLst>
               <a:ext uri="{FF2B5EF4-FFF2-40B4-BE49-F238E27FC236}">
-                <a16:creationId xmlns:a16="http://schemas.microsoft.com/office/drawing/2014/main" id="{FC1EA3FC-6D06-DE2A-7359-E996B68582AA}"/>
+                <a16:creationId xmlns:a16="http://schemas.microsoft.com/office/drawing/2014/main" id="{1FA51A44-DDD7-19CC-2368-521C28DA4651}"/>
               </a:ext>
             </a:extLst>
           </p:cNvPr>
@@ -1270,7 +1270,7 @@
           <p:cNvPr id="6" name="スライド番号プレースホルダー 5">
             <a:extLst>
               <a:ext uri="{FF2B5EF4-FFF2-40B4-BE49-F238E27FC236}">
-                <a16:creationId xmlns:a16="http://schemas.microsoft.com/office/drawing/2014/main" id="{63D90F53-3E44-7CAD-E9F0-7FAB001050F6}"/>
+                <a16:creationId xmlns:a16="http://schemas.microsoft.com/office/drawing/2014/main" id="{B0295B63-0000-9B6A-A1E3-C803E0AD37DC}"/>
               </a:ext>
             </a:extLst>
           </p:cNvPr>
@@ -1286,7 +1286,7 @@
           <a:bodyPr/>
           <a:lstStyle/>
           <a:p>
-            <a:fld id="{1C22CFA1-0640-430D-AC4F-C2F08AD884EE}" type="slidenum">
+            <a:fld id="{EC3ABCF7-C4B6-4433-AADA-1C1D6E37E2FE}" type="slidenum">
               <a:rPr kumimoji="1" lang="ja-JP" altLang="en-US" smtClean="0"/>
               <a:t>‹#›</a:t>
             </a:fld>
@@ -1297,7 +1297,7 @@
     </p:spTree>
     <p:extLst>
       <p:ext uri="{BB962C8B-B14F-4D97-AF65-F5344CB8AC3E}">
-        <p14:creationId xmlns:p14="http://schemas.microsoft.com/office/powerpoint/2010/main" val="3696691500"/>
+        <p14:creationId xmlns:p14="http://schemas.microsoft.com/office/powerpoint/2010/main" val="1663822023"/>
       </p:ext>
     </p:extLst>
   </p:cSld>
@@ -1329,7 +1329,7 @@
           <p:cNvPr id="2" name="タイトル 1">
             <a:extLst>
               <a:ext uri="{FF2B5EF4-FFF2-40B4-BE49-F238E27FC236}">
-                <a16:creationId xmlns:a16="http://schemas.microsoft.com/office/drawing/2014/main" id="{FC543B34-1344-3470-7286-3A367F73783B}"/>
+                <a16:creationId xmlns:a16="http://schemas.microsoft.com/office/drawing/2014/main" id="{BD5BFFF3-15B6-C3AE-CCDA-862A5E86A3AA}"/>
               </a:ext>
             </a:extLst>
           </p:cNvPr>
@@ -1357,7 +1357,7 @@
           <p:cNvPr id="3" name="コンテンツ プレースホルダー 2">
             <a:extLst>
               <a:ext uri="{FF2B5EF4-FFF2-40B4-BE49-F238E27FC236}">
-                <a16:creationId xmlns:a16="http://schemas.microsoft.com/office/drawing/2014/main" id="{49E342F3-E707-1959-3790-1619F421C9AB}"/>
+                <a16:creationId xmlns:a16="http://schemas.microsoft.com/office/drawing/2014/main" id="{3C8982B4-F4C6-FD20-CE96-3F84655B03AA}"/>
               </a:ext>
             </a:extLst>
           </p:cNvPr>
@@ -1451,7 +1451,7 @@
           <p:cNvPr id="4" name="コンテンツ プレースホルダー 3">
             <a:extLst>
               <a:ext uri="{FF2B5EF4-FFF2-40B4-BE49-F238E27FC236}">
-                <a16:creationId xmlns:a16="http://schemas.microsoft.com/office/drawing/2014/main" id="{3E7A6134-7BEB-D951-6CB5-2B7F75A6E03B}"/>
+                <a16:creationId xmlns:a16="http://schemas.microsoft.com/office/drawing/2014/main" id="{87AE2B38-DD2D-2538-34D9-EB6DEBEBB062}"/>
               </a:ext>
             </a:extLst>
           </p:cNvPr>
@@ -1545,7 +1545,7 @@
           <p:cNvPr id="5" name="日付プレースホルダー 4">
             <a:extLst>
               <a:ext uri="{FF2B5EF4-FFF2-40B4-BE49-F238E27FC236}">
-                <a16:creationId xmlns:a16="http://schemas.microsoft.com/office/drawing/2014/main" id="{4189E74E-5B5E-3479-D52D-0F449E0E1396}"/>
+                <a16:creationId xmlns:a16="http://schemas.microsoft.com/office/drawing/2014/main" id="{4079B99E-653F-6386-EF06-36AB9B9CFD13}"/>
               </a:ext>
             </a:extLst>
           </p:cNvPr>
@@ -1561,7 +1561,7 @@
           <a:bodyPr/>
           <a:lstStyle/>
           <a:p>
-            <a:fld id="{AD7F3C31-AADC-421A-A3BA-3DA6E648B9CB}" type="datetimeFigureOut">
+            <a:fld id="{585CCA5C-7CC9-4869-820C-4AF759F38EEA}" type="datetimeFigureOut">
               <a:rPr kumimoji="1" lang="ja-JP" altLang="en-US" smtClean="0"/>
               <a:t>2026/7/30</a:t>
             </a:fld>
@@ -1574,7 +1574,7 @@
           <p:cNvPr id="6" name="フッター プレースホルダー 5">
             <a:extLst>
               <a:ext uri="{FF2B5EF4-FFF2-40B4-BE49-F238E27FC236}">
-                <a16:creationId xmlns:a16="http://schemas.microsoft.com/office/drawing/2014/main" id="{81289F02-BF85-66F7-90C0-A9A3896B31E5}"/>
+                <a16:creationId xmlns:a16="http://schemas.microsoft.com/office/drawing/2014/main" id="{CC461B71-4C03-6CAE-ADBF-B59355A9FB57}"/>
               </a:ext>
             </a:extLst>
           </p:cNvPr>
@@ -1599,7 +1599,7 @@
           <p:cNvPr id="7" name="スライド番号プレースホルダー 6">
             <a:extLst>
               <a:ext uri="{FF2B5EF4-FFF2-40B4-BE49-F238E27FC236}">
-                <a16:creationId xmlns:a16="http://schemas.microsoft.com/office/drawing/2014/main" id="{A015F3CF-0526-64FF-72C0-80AD4E241AC6}"/>
+                <a16:creationId xmlns:a16="http://schemas.microsoft.com/office/drawing/2014/main" id="{30782B8D-0528-C28E-4DB0-1B7DB2F9B713}"/>
               </a:ext>
             </a:extLst>
           </p:cNvPr>
@@ -1615,7 +1615,7 @@
           <a:bodyPr/>
           <a:lstStyle/>
           <a:p>
-            <a:fld id="{1C22CFA1-0640-430D-AC4F-C2F08AD884EE}" type="slidenum">
+            <a:fld id="{EC3ABCF7-C4B6-4433-AADA-1C1D6E37E2FE}" type="slidenum">
               <a:rPr kumimoji="1" lang="ja-JP" altLang="en-US" smtClean="0"/>
               <a:t>‹#›</a:t>
             </a:fld>
@@ -1626,7 +1626,7 @@
     </p:spTree>
     <p:extLst>
       <p:ext uri="{BB962C8B-B14F-4D97-AF65-F5344CB8AC3E}">
-        <p14:creationId xmlns:p14="http://schemas.microsoft.com/office/powerpoint/2010/main" val="4128149175"/>
+        <p14:creationId xmlns:p14="http://schemas.microsoft.com/office/powerpoint/2010/main" val="594291652"/>
       </p:ext>
     </p:extLst>
   </p:cSld>
@@ -1658,7 +1658,7 @@
           <p:cNvPr id="2" name="タイトル 1">
             <a:extLst>
               <a:ext uri="{FF2B5EF4-FFF2-40B4-BE49-F238E27FC236}">
-                <a16:creationId xmlns:a16="http://schemas.microsoft.com/office/drawing/2014/main" id="{6EAA25B3-1E32-95CD-7E45-65521B8A11A9}"/>
+                <a16:creationId xmlns:a16="http://schemas.microsoft.com/office/drawing/2014/main" id="{88DAE68E-71A9-B984-3043-D5072588FBC0}"/>
               </a:ext>
             </a:extLst>
           </p:cNvPr>
@@ -1691,7 +1691,7 @@
           <p:cNvPr id="3" name="テキスト プレースホルダー 2">
             <a:extLst>
               <a:ext uri="{FF2B5EF4-FFF2-40B4-BE49-F238E27FC236}">
-                <a16:creationId xmlns:a16="http://schemas.microsoft.com/office/drawing/2014/main" id="{ED36D1DD-61A8-E3E9-8FC9-6159E75D3194}"/>
+                <a16:creationId xmlns:a16="http://schemas.microsoft.com/office/drawing/2014/main" id="{80F89581-351F-A7D6-8D57-00380C52EB0B}"/>
               </a:ext>
             </a:extLst>
           </p:cNvPr>
@@ -1762,7 +1762,7 @@
           <p:cNvPr id="4" name="コンテンツ プレースホルダー 3">
             <a:extLst>
               <a:ext uri="{FF2B5EF4-FFF2-40B4-BE49-F238E27FC236}">
-                <a16:creationId xmlns:a16="http://schemas.microsoft.com/office/drawing/2014/main" id="{EB1844A2-1CA4-166D-016E-CE4CFA2098CC}"/>
+                <a16:creationId xmlns:a16="http://schemas.microsoft.com/office/drawing/2014/main" id="{4DD5D776-FBDA-8F2F-3DEE-FF7D35C15CA6}"/>
               </a:ext>
             </a:extLst>
           </p:cNvPr>
@@ -1856,7 +1856,7 @@
           <p:cNvPr id="5" name="テキスト プレースホルダー 4">
             <a:extLst>
               <a:ext uri="{FF2B5EF4-FFF2-40B4-BE49-F238E27FC236}">
-                <a16:creationId xmlns:a16="http://schemas.microsoft.com/office/drawing/2014/main" id="{85EF2DCE-761B-DAFD-E7A7-EB8B8A05C74C}"/>
+                <a16:creationId xmlns:a16="http://schemas.microsoft.com/office/drawing/2014/main" id="{FC0C23DA-5950-3604-7A66-8C8E165EA752}"/>
               </a:ext>
             </a:extLst>
           </p:cNvPr>
@@ -1927,7 +1927,7 @@
           <p:cNvPr id="6" name="コンテンツ プレースホルダー 5">
             <a:extLst>
               <a:ext uri="{FF2B5EF4-FFF2-40B4-BE49-F238E27FC236}">
-                <a16:creationId xmlns:a16="http://schemas.microsoft.com/office/drawing/2014/main" id="{D300A92A-06B6-D237-6983-71687483EB3B}"/>
+                <a16:creationId xmlns:a16="http://schemas.microsoft.com/office/drawing/2014/main" id="{0324B2AB-EE5D-F18E-2A58-233C98B1AF6E}"/>
               </a:ext>
             </a:extLst>
           </p:cNvPr>
@@ -2021,7 +2021,7 @@
           <p:cNvPr id="7" name="日付プレースホルダー 6">
             <a:extLst>
               <a:ext uri="{FF2B5EF4-FFF2-40B4-BE49-F238E27FC236}">
-                <a16:creationId xmlns:a16="http://schemas.microsoft.com/office/drawing/2014/main" id="{6B74A086-B1CA-2988-18D2-B447B0DE5596}"/>
+                <a16:creationId xmlns:a16="http://schemas.microsoft.com/office/drawing/2014/main" id="{70216EC0-2BED-B434-5B62-27ED8000AE72}"/>
               </a:ext>
             </a:extLst>
           </p:cNvPr>
@@ -2037,7 +2037,7 @@
           <a:bodyPr/>
           <a:lstStyle/>
           <a:p>
-            <a:fld id="{AD7F3C31-AADC-421A-A3BA-3DA6E648B9CB}" type="datetimeFigureOut">
+            <a:fld id="{585CCA5C-7CC9-4869-820C-4AF759F38EEA}" type="datetimeFigureOut">
               <a:rPr kumimoji="1" lang="ja-JP" altLang="en-US" smtClean="0"/>
               <a:t>2026/7/30</a:t>
             </a:fld>
@@ -2050,7 +2050,7 @@
           <p:cNvPr id="8" name="フッター プレースホルダー 7">
             <a:extLst>
               <a:ext uri="{FF2B5EF4-FFF2-40B4-BE49-F238E27FC236}">
-                <a16:creationId xmlns:a16="http://schemas.microsoft.com/office/drawing/2014/main" id="{577FA307-ECE6-F286-A1D2-3596C3D4D8C6}"/>
+                <a16:creationId xmlns:a16="http://schemas.microsoft.com/office/drawing/2014/main" id="{95ECA7A6-E57E-49D9-228E-92CD1401057C}"/>
               </a:ext>
             </a:extLst>
           </p:cNvPr>
@@ -2075,7 +2075,7 @@
           <p:cNvPr id="9" name="スライド番号プレースホルダー 8">
             <a:extLst>
               <a:ext uri="{FF2B5EF4-FFF2-40B4-BE49-F238E27FC236}">
-                <a16:creationId xmlns:a16="http://schemas.microsoft.com/office/drawing/2014/main" id="{5703E17B-35EC-7649-AE92-29B7DA8D5844}"/>
+                <a16:creationId xmlns:a16="http://schemas.microsoft.com/office/drawing/2014/main" id="{86590B1C-CC28-A344-A1FF-EB2F52BC4FFA}"/>
               </a:ext>
             </a:extLst>
           </p:cNvPr>
@@ -2091,7 +2091,7 @@
           <a:bodyPr/>
           <a:lstStyle/>
           <a:p>
-            <a:fld id="{1C22CFA1-0640-430D-AC4F-C2F08AD884EE}" type="slidenum">
+            <a:fld id="{EC3ABCF7-C4B6-4433-AADA-1C1D6E37E2FE}" type="slidenum">
               <a:rPr kumimoji="1" lang="ja-JP" altLang="en-US" smtClean="0"/>
               <a:t>‹#›</a:t>
             </a:fld>
@@ -2102,7 +2102,7 @@
     </p:spTree>
     <p:extLst>
       <p:ext uri="{BB962C8B-B14F-4D97-AF65-F5344CB8AC3E}">
-        <p14:creationId xmlns:p14="http://schemas.microsoft.com/office/powerpoint/2010/main" val="4198700668"/>
+        <p14:creationId xmlns:p14="http://schemas.microsoft.com/office/powerpoint/2010/main" val="4100857222"/>
       </p:ext>
     </p:extLst>
   </p:cSld>
@@ -2134,7 +2134,7 @@
           <p:cNvPr id="2" name="タイトル 1">
             <a:extLst>
               <a:ext uri="{FF2B5EF4-FFF2-40B4-BE49-F238E27FC236}">
-                <a16:creationId xmlns:a16="http://schemas.microsoft.com/office/drawing/2014/main" id="{D4084D24-DC30-EFF7-ACD8-99F9C5D2134D}"/>
+                <a16:creationId xmlns:a16="http://schemas.microsoft.com/office/drawing/2014/main" id="{17E470D4-D9B0-2377-8473-AA2529394B17}"/>
               </a:ext>
             </a:extLst>
           </p:cNvPr>
@@ -2162,7 +2162,7 @@
           <p:cNvPr id="3" name="日付プレースホルダー 2">
             <a:extLst>
               <a:ext uri="{FF2B5EF4-FFF2-40B4-BE49-F238E27FC236}">
-                <a16:creationId xmlns:a16="http://schemas.microsoft.com/office/drawing/2014/main" id="{F7965DCD-58DE-A0C9-9DB7-D36127BA1696}"/>
+                <a16:creationId xmlns:a16="http://schemas.microsoft.com/office/drawing/2014/main" id="{1253D5D5-E0A1-9D88-8018-4AB3CF0DD945}"/>
               </a:ext>
             </a:extLst>
           </p:cNvPr>
@@ -2178,7 +2178,7 @@
           <a:bodyPr/>
           <a:lstStyle/>
           <a:p>
-            <a:fld id="{AD7F3C31-AADC-421A-A3BA-3DA6E648B9CB}" type="datetimeFigureOut">
+            <a:fld id="{585CCA5C-7CC9-4869-820C-4AF759F38EEA}" type="datetimeFigureOut">
               <a:rPr kumimoji="1" lang="ja-JP" altLang="en-US" smtClean="0"/>
               <a:t>2026/7/30</a:t>
             </a:fld>
@@ -2191,7 +2191,7 @@
           <p:cNvPr id="4" name="フッター プレースホルダー 3">
             <a:extLst>
               <a:ext uri="{FF2B5EF4-FFF2-40B4-BE49-F238E27FC236}">
-                <a16:creationId xmlns:a16="http://schemas.microsoft.com/office/drawing/2014/main" id="{E1DC2B97-448B-07C9-B628-F654F94112AE}"/>
+                <a16:creationId xmlns:a16="http://schemas.microsoft.com/office/drawing/2014/main" id="{70A2520D-ED6E-45A7-4EB3-509E221DF761}"/>
               </a:ext>
             </a:extLst>
           </p:cNvPr>
@@ -2216,7 +2216,7 @@
           <p:cNvPr id="5" name="スライド番号プレースホルダー 4">
             <a:extLst>
               <a:ext uri="{FF2B5EF4-FFF2-40B4-BE49-F238E27FC236}">
-                <a16:creationId xmlns:a16="http://schemas.microsoft.com/office/drawing/2014/main" id="{49B299EC-6DBE-7B62-0BCD-1E687E2C5C7F}"/>
+                <a16:creationId xmlns:a16="http://schemas.microsoft.com/office/drawing/2014/main" id="{8683020B-66A6-88D3-45C2-1526D5403246}"/>
               </a:ext>
             </a:extLst>
           </p:cNvPr>
@@ -2232,7 +2232,7 @@
           <a:bodyPr/>
           <a:lstStyle/>
           <a:p>
-            <a:fld id="{1C22CFA1-0640-430D-AC4F-C2F08AD884EE}" type="slidenum">
+            <a:fld id="{EC3ABCF7-C4B6-4433-AADA-1C1D6E37E2FE}" type="slidenum">
               <a:rPr kumimoji="1" lang="ja-JP" altLang="en-US" smtClean="0"/>
               <a:t>‹#›</a:t>
             </a:fld>
@@ -2243,7 +2243,7 @@
     </p:spTree>
     <p:extLst>
       <p:ext uri="{BB962C8B-B14F-4D97-AF65-F5344CB8AC3E}">
-        <p14:creationId xmlns:p14="http://schemas.microsoft.com/office/powerpoint/2010/main" val="3472293482"/>
+        <p14:creationId xmlns:p14="http://schemas.microsoft.com/office/powerpoint/2010/main" val="3762090088"/>
       </p:ext>
     </p:extLst>
   </p:cSld>
@@ -2275,7 +2275,7 @@
           <p:cNvPr id="2" name="日付プレースホルダー 1">
             <a:extLst>
               <a:ext uri="{FF2B5EF4-FFF2-40B4-BE49-F238E27FC236}">
-                <a16:creationId xmlns:a16="http://schemas.microsoft.com/office/drawing/2014/main" id="{24F40FA5-9E26-2080-F765-73A064DE3E1E}"/>
+                <a16:creationId xmlns:a16="http://schemas.microsoft.com/office/drawing/2014/main" id="{6EA4591D-B7B3-10A7-EAF1-CA2F6D07CC9B}"/>
               </a:ext>
             </a:extLst>
           </p:cNvPr>
@@ -2291,7 +2291,7 @@
           <a:bodyPr/>
           <a:lstStyle/>
           <a:p>
-            <a:fld id="{AD7F3C31-AADC-421A-A3BA-3DA6E648B9CB}" type="datetimeFigureOut">
+            <a:fld id="{585CCA5C-7CC9-4869-820C-4AF759F38EEA}" type="datetimeFigureOut">
               <a:rPr kumimoji="1" lang="ja-JP" altLang="en-US" smtClean="0"/>
               <a:t>2026/7/30</a:t>
             </a:fld>
@@ -2304,7 +2304,7 @@
           <p:cNvPr id="3" name="フッター プレースホルダー 2">
             <a:extLst>
               <a:ext uri="{FF2B5EF4-FFF2-40B4-BE49-F238E27FC236}">
-                <a16:creationId xmlns:a16="http://schemas.microsoft.com/office/drawing/2014/main" id="{BDBB8CAC-0D1D-A967-93AA-92A9FFF41D9B}"/>
+                <a16:creationId xmlns:a16="http://schemas.microsoft.com/office/drawing/2014/main" id="{80EECE0C-84A8-EB5C-DB03-A33283C39858}"/>
               </a:ext>
             </a:extLst>
           </p:cNvPr>
@@ -2329,7 +2329,7 @@
           <p:cNvPr id="4" name="スライド番号プレースホルダー 3">
             <a:extLst>
               <a:ext uri="{FF2B5EF4-FFF2-40B4-BE49-F238E27FC236}">
-                <a16:creationId xmlns:a16="http://schemas.microsoft.com/office/drawing/2014/main" id="{AAE3B4D2-A7F1-A151-AA0E-96A490AE1E30}"/>
+                <a16:creationId xmlns:a16="http://schemas.microsoft.com/office/drawing/2014/main" id="{3704A7DA-2BA8-E9D4-FE70-BA7EF8F611C2}"/>
               </a:ext>
             </a:extLst>
           </p:cNvPr>
@@ -2345,7 +2345,7 @@
           <a:bodyPr/>
           <a:lstStyle/>
           <a:p>
-            <a:fld id="{1C22CFA1-0640-430D-AC4F-C2F08AD884EE}" type="slidenum">
+            <a:fld id="{EC3ABCF7-C4B6-4433-AADA-1C1D6E37E2FE}" type="slidenum">
               <a:rPr kumimoji="1" lang="ja-JP" altLang="en-US" smtClean="0"/>
               <a:t>‹#›</a:t>
             </a:fld>
@@ -2356,7 +2356,7 @@
     </p:spTree>
     <p:extLst>
       <p:ext uri="{BB962C8B-B14F-4D97-AF65-F5344CB8AC3E}">
-        <p14:creationId xmlns:p14="http://schemas.microsoft.com/office/powerpoint/2010/main" val="2484465787"/>
+        <p14:creationId xmlns:p14="http://schemas.microsoft.com/office/powerpoint/2010/main" val="3257592092"/>
       </p:ext>
     </p:extLst>
   </p:cSld>
@@ -2388,7 +2388,7 @@
           <p:cNvPr id="2" name="タイトル 1">
             <a:extLst>
               <a:ext uri="{FF2B5EF4-FFF2-40B4-BE49-F238E27FC236}">
-                <a16:creationId xmlns:a16="http://schemas.microsoft.com/office/drawing/2014/main" id="{8A6D9070-49B8-FB16-5371-628F168A26F0}"/>
+                <a16:creationId xmlns:a16="http://schemas.microsoft.com/office/drawing/2014/main" id="{68781D0F-F694-2797-C354-363196297424}"/>
               </a:ext>
             </a:extLst>
           </p:cNvPr>
@@ -2425,7 +2425,7 @@
           <p:cNvPr id="3" name="コンテンツ プレースホルダー 2">
             <a:extLst>
               <a:ext uri="{FF2B5EF4-FFF2-40B4-BE49-F238E27FC236}">
-                <a16:creationId xmlns:a16="http://schemas.microsoft.com/office/drawing/2014/main" id="{2E8E549F-40CA-73FB-085A-B635C7614F18}"/>
+                <a16:creationId xmlns:a16="http://schemas.microsoft.com/office/drawing/2014/main" id="{F73B91B3-543F-E586-8372-DABE295B486C}"/>
               </a:ext>
             </a:extLst>
           </p:cNvPr>
@@ -2547,7 +2547,7 @@
           <p:cNvPr id="4" name="テキスト プレースホルダー 3">
             <a:extLst>
               <a:ext uri="{FF2B5EF4-FFF2-40B4-BE49-F238E27FC236}">
-                <a16:creationId xmlns:a16="http://schemas.microsoft.com/office/drawing/2014/main" id="{EB7EF714-0913-502C-64DA-2BC7D768031D}"/>
+                <a16:creationId xmlns:a16="http://schemas.microsoft.com/office/drawing/2014/main" id="{51ED7347-39B4-E9B3-6254-30DDFC3643BE}"/>
               </a:ext>
             </a:extLst>
           </p:cNvPr>
@@ -2618,7 +2618,7 @@
           <p:cNvPr id="5" name="日付プレースホルダー 4">
             <a:extLst>
               <a:ext uri="{FF2B5EF4-FFF2-40B4-BE49-F238E27FC236}">
-                <a16:creationId xmlns:a16="http://schemas.microsoft.com/office/drawing/2014/main" id="{F4B12162-FCBC-781A-F10E-B73E7B0B6D18}"/>
+                <a16:creationId xmlns:a16="http://schemas.microsoft.com/office/drawing/2014/main" id="{8408DC34-996B-0981-C51F-6582B97AB84B}"/>
               </a:ext>
             </a:extLst>
           </p:cNvPr>
@@ -2634,7 +2634,7 @@
           <a:bodyPr/>
           <a:lstStyle/>
           <a:p>
-            <a:fld id="{AD7F3C31-AADC-421A-A3BA-3DA6E648B9CB}" type="datetimeFigureOut">
+            <a:fld id="{585CCA5C-7CC9-4869-820C-4AF759F38EEA}" type="datetimeFigureOut">
               <a:rPr kumimoji="1" lang="ja-JP" altLang="en-US" smtClean="0"/>
               <a:t>2026/7/30</a:t>
             </a:fld>
@@ -2647,7 +2647,7 @@
           <p:cNvPr id="6" name="フッター プレースホルダー 5">
             <a:extLst>
               <a:ext uri="{FF2B5EF4-FFF2-40B4-BE49-F238E27FC236}">
-                <a16:creationId xmlns:a16="http://schemas.microsoft.com/office/drawing/2014/main" id="{C82CF6CD-1BB5-9032-AC67-ABB389355CC4}"/>
+                <a16:creationId xmlns:a16="http://schemas.microsoft.com/office/drawing/2014/main" id="{0DA4DC9D-84CF-B5E2-1D1B-A5C59C2D86D8}"/>
               </a:ext>
             </a:extLst>
           </p:cNvPr>
@@ -2672,7 +2672,7 @@
           <p:cNvPr id="7" name="スライド番号プレースホルダー 6">
             <a:extLst>
               <a:ext uri="{FF2B5EF4-FFF2-40B4-BE49-F238E27FC236}">
-                <a16:creationId xmlns:a16="http://schemas.microsoft.com/office/drawing/2014/main" id="{A350E1E1-6F98-97A2-AEE6-78B258AEC529}"/>
+                <a16:creationId xmlns:a16="http://schemas.microsoft.com/office/drawing/2014/main" id="{A5B10EF6-2D0B-1F2B-BAE9-8BFEBF2D1B4F}"/>
               </a:ext>
             </a:extLst>
           </p:cNvPr>
@@ -2688,7 +2688,7 @@
           <a:bodyPr/>
           <a:lstStyle/>
           <a:p>
-            <a:fld id="{1C22CFA1-0640-430D-AC4F-C2F08AD884EE}" type="slidenum">
+            <a:fld id="{EC3ABCF7-C4B6-4433-AADA-1C1D6E37E2FE}" type="slidenum">
               <a:rPr kumimoji="1" lang="ja-JP" altLang="en-US" smtClean="0"/>
               <a:t>‹#›</a:t>
             </a:fld>
@@ -2699,7 +2699,7 @@
     </p:spTree>
     <p:extLst>
       <p:ext uri="{BB962C8B-B14F-4D97-AF65-F5344CB8AC3E}">
-        <p14:creationId xmlns:p14="http://schemas.microsoft.com/office/powerpoint/2010/main" val="1844877927"/>
+        <p14:creationId xmlns:p14="http://schemas.microsoft.com/office/powerpoint/2010/main" val="3101222534"/>
       </p:ext>
     </p:extLst>
   </p:cSld>
@@ -2731,7 +2731,7 @@
           <p:cNvPr id="2" name="タイトル 1">
             <a:extLst>
               <a:ext uri="{FF2B5EF4-FFF2-40B4-BE49-F238E27FC236}">
-                <a16:creationId xmlns:a16="http://schemas.microsoft.com/office/drawing/2014/main" id="{201D4957-4568-86A7-37B7-E8C0685F5A4C}"/>
+                <a16:creationId xmlns:a16="http://schemas.microsoft.com/office/drawing/2014/main" id="{E8B88C41-E4C8-0B37-77A2-9DBA368D9AD0}"/>
               </a:ext>
             </a:extLst>
           </p:cNvPr>
@@ -2768,7 +2768,7 @@
           <p:cNvPr id="3" name="図プレースホルダー 2">
             <a:extLst>
               <a:ext uri="{FF2B5EF4-FFF2-40B4-BE49-F238E27FC236}">
-                <a16:creationId xmlns:a16="http://schemas.microsoft.com/office/drawing/2014/main" id="{21DEE9C1-AA68-9BD5-1F6F-307371FCBDF4}"/>
+                <a16:creationId xmlns:a16="http://schemas.microsoft.com/office/drawing/2014/main" id="{8A008B35-6C7E-0A7C-38B1-27720FED5884}"/>
               </a:ext>
             </a:extLst>
           </p:cNvPr>
@@ -2835,7 +2835,7 @@
           <p:cNvPr id="4" name="テキスト プレースホルダー 3">
             <a:extLst>
               <a:ext uri="{FF2B5EF4-FFF2-40B4-BE49-F238E27FC236}">
-                <a16:creationId xmlns:a16="http://schemas.microsoft.com/office/drawing/2014/main" id="{CCF19F2A-243F-27A4-9EAA-274FD377B14D}"/>
+                <a16:creationId xmlns:a16="http://schemas.microsoft.com/office/drawing/2014/main" id="{BB5B6B7A-D689-A582-E4E9-ABF9275D5011}"/>
               </a:ext>
             </a:extLst>
           </p:cNvPr>
@@ -2906,7 +2906,7 @@
           <p:cNvPr id="5" name="日付プレースホルダー 4">
             <a:extLst>
               <a:ext uri="{FF2B5EF4-FFF2-40B4-BE49-F238E27FC236}">
-                <a16:creationId xmlns:a16="http://schemas.microsoft.com/office/drawing/2014/main" id="{79202822-AD8E-EDAB-4FEA-1B805708B827}"/>
+                <a16:creationId xmlns:a16="http://schemas.microsoft.com/office/drawing/2014/main" id="{9BED682D-BC58-CA3F-6D74-A8C39D2E75C8}"/>
               </a:ext>
             </a:extLst>
           </p:cNvPr>
@@ -2922,7 +2922,7 @@
           <a:bodyPr/>
           <a:lstStyle/>
           <a:p>
-            <a:fld id="{AD7F3C31-AADC-421A-A3BA-3DA6E648B9CB}" type="datetimeFigureOut">
+            <a:fld id="{585CCA5C-7CC9-4869-820C-4AF759F38EEA}" type="datetimeFigureOut">
               <a:rPr kumimoji="1" lang="ja-JP" altLang="en-US" smtClean="0"/>
               <a:t>2026/7/30</a:t>
             </a:fld>
@@ -2935,7 +2935,7 @@
           <p:cNvPr id="6" name="フッター プレースホルダー 5">
             <a:extLst>
               <a:ext uri="{FF2B5EF4-FFF2-40B4-BE49-F238E27FC236}">
-                <a16:creationId xmlns:a16="http://schemas.microsoft.com/office/drawing/2014/main" id="{1A7FC04C-F4BD-7074-352D-F51764545F80}"/>
+                <a16:creationId xmlns:a16="http://schemas.microsoft.com/office/drawing/2014/main" id="{17D7BD0E-5C03-3B99-1474-AD6D8C5CE837}"/>
               </a:ext>
             </a:extLst>
           </p:cNvPr>
@@ -2960,7 +2960,7 @@
           <p:cNvPr id="7" name="スライド番号プレースホルダー 6">
             <a:extLst>
               <a:ext uri="{FF2B5EF4-FFF2-40B4-BE49-F238E27FC236}">
-                <a16:creationId xmlns:a16="http://schemas.microsoft.com/office/drawing/2014/main" id="{9BC9EE28-999D-4414-9C96-74A2F201A64B}"/>
+                <a16:creationId xmlns:a16="http://schemas.microsoft.com/office/drawing/2014/main" id="{C9FFBCC6-BC43-408F-EF57-D629C603B8B2}"/>
               </a:ext>
             </a:extLst>
           </p:cNvPr>
@@ -2976,7 +2976,7 @@
           <a:bodyPr/>
           <a:lstStyle/>
           <a:p>
-            <a:fld id="{1C22CFA1-0640-430D-AC4F-C2F08AD884EE}" type="slidenum">
+            <a:fld id="{EC3ABCF7-C4B6-4433-AADA-1C1D6E37E2FE}" type="slidenum">
               <a:rPr kumimoji="1" lang="ja-JP" altLang="en-US" smtClean="0"/>
               <a:t>‹#›</a:t>
             </a:fld>
@@ -2987,7 +2987,7 @@
     </p:spTree>
     <p:extLst>
       <p:ext uri="{BB962C8B-B14F-4D97-AF65-F5344CB8AC3E}">
-        <p14:creationId xmlns:p14="http://schemas.microsoft.com/office/powerpoint/2010/main" val="673911608"/>
+        <p14:creationId xmlns:p14="http://schemas.microsoft.com/office/powerpoint/2010/main" val="4075103815"/>
       </p:ext>
     </p:extLst>
   </p:cSld>
@@ -3024,7 +3024,7 @@
           <p:cNvPr id="2" name="タイトル プレースホルダー 1">
             <a:extLst>
               <a:ext uri="{FF2B5EF4-FFF2-40B4-BE49-F238E27FC236}">
-                <a16:creationId xmlns:a16="http://schemas.microsoft.com/office/drawing/2014/main" id="{82DF255E-DB5F-3138-92C0-F60FEC455E75}"/>
+                <a16:creationId xmlns:a16="http://schemas.microsoft.com/office/drawing/2014/main" id="{00B254DF-65CC-FEFC-98D5-71CAF3548A8B}"/>
               </a:ext>
             </a:extLst>
           </p:cNvPr>
@@ -3062,7 +3062,7 @@
           <p:cNvPr id="3" name="テキスト プレースホルダー 2">
             <a:extLst>
               <a:ext uri="{FF2B5EF4-FFF2-40B4-BE49-F238E27FC236}">
-                <a16:creationId xmlns:a16="http://schemas.microsoft.com/office/drawing/2014/main" id="{E5BC3810-749D-0572-5A7B-B4FD84CA6DA5}"/>
+                <a16:creationId xmlns:a16="http://schemas.microsoft.com/office/drawing/2014/main" id="{492C30EE-CDF1-799E-D414-76AB237E4077}"/>
               </a:ext>
             </a:extLst>
           </p:cNvPr>
@@ -3161,7 +3161,7 @@
           <p:cNvPr id="4" name="日付プレースホルダー 3">
             <a:extLst>
               <a:ext uri="{FF2B5EF4-FFF2-40B4-BE49-F238E27FC236}">
-                <a16:creationId xmlns:a16="http://schemas.microsoft.com/office/drawing/2014/main" id="{104669C7-A46E-497B-D17C-2E96B72A3D47}"/>
+                <a16:creationId xmlns:a16="http://schemas.microsoft.com/office/drawing/2014/main" id="{50BD1228-93E6-B78F-0F4A-DFC41637EC95}"/>
               </a:ext>
             </a:extLst>
           </p:cNvPr>
@@ -3195,7 +3195,7 @@
             </a:lvl1pPr>
           </a:lstStyle>
           <a:p>
-            <a:fld id="{AD7F3C31-AADC-421A-A3BA-3DA6E648B9CB}" type="datetimeFigureOut">
+            <a:fld id="{585CCA5C-7CC9-4869-820C-4AF759F38EEA}" type="datetimeFigureOut">
               <a:rPr kumimoji="1" lang="ja-JP" altLang="en-US" smtClean="0"/>
               <a:t>2026/7/30</a:t>
             </a:fld>
@@ -3208,7 +3208,7 @@
           <p:cNvPr id="5" name="フッター プレースホルダー 4">
             <a:extLst>
               <a:ext uri="{FF2B5EF4-FFF2-40B4-BE49-F238E27FC236}">
-                <a16:creationId xmlns:a16="http://schemas.microsoft.com/office/drawing/2014/main" id="{270483DB-487A-3290-913F-CC38D780DB9E}"/>
+                <a16:creationId xmlns:a16="http://schemas.microsoft.com/office/drawing/2014/main" id="{E56F1F15-DB3D-5ED7-686E-344177F59B8C}"/>
               </a:ext>
             </a:extLst>
           </p:cNvPr>
@@ -3251,7 +3251,7 @@
           <p:cNvPr id="6" name="スライド番号プレースホルダー 5">
             <a:extLst>
               <a:ext uri="{FF2B5EF4-FFF2-40B4-BE49-F238E27FC236}">
-                <a16:creationId xmlns:a16="http://schemas.microsoft.com/office/drawing/2014/main" id="{B260C137-B59C-6560-965B-2945B60CAE08}"/>
+                <a16:creationId xmlns:a16="http://schemas.microsoft.com/office/drawing/2014/main" id="{5B20E8D5-CD69-E699-DF7B-9EF938111E1E}"/>
               </a:ext>
             </a:extLst>
           </p:cNvPr>
@@ -3285,7 +3285,7 @@
             </a:lvl1pPr>
           </a:lstStyle>
           <a:p>
-            <a:fld id="{1C22CFA1-0640-430D-AC4F-C2F08AD884EE}" type="slidenum">
+            <a:fld id="{EC3ABCF7-C4B6-4433-AADA-1C1D6E37E2FE}" type="slidenum">
               <a:rPr kumimoji="1" lang="ja-JP" altLang="en-US" smtClean="0"/>
               <a:t>‹#›</a:t>
             </a:fld>
@@ -3296,7 +3296,7 @@
     </p:spTree>
     <p:extLst>
       <p:ext uri="{BB962C8B-B14F-4D97-AF65-F5344CB8AC3E}">
-        <p14:creationId xmlns:p14="http://schemas.microsoft.com/office/powerpoint/2010/main" val="530261011"/>
+        <p14:creationId xmlns:p14="http://schemas.microsoft.com/office/powerpoint/2010/main" val="4230574267"/>
       </p:ext>
     </p:extLst>
   </p:cSld>
@@ -3619,7 +3619,7 @@
           <p:cNvPr id="2" name="テキスト ボックス 1">
             <a:extLst>
               <a:ext uri="{FF2B5EF4-FFF2-40B4-BE49-F238E27FC236}">
-                <a16:creationId xmlns:a16="http://schemas.microsoft.com/office/drawing/2014/main" id="{D9FCE6D9-4081-2A7A-655B-F562F25DB7BA}"/>
+                <a16:creationId xmlns:a16="http://schemas.microsoft.com/office/drawing/2014/main" id="{0CBEC725-659B-E57A-7A4B-CCA808CD2661}"/>
               </a:ext>
             </a:extLst>
           </p:cNvPr>
@@ -3665,7 +3665,7 @@
           <p:cNvPr id="3" name="テキスト ボックス 2">
             <a:extLst>
               <a:ext uri="{FF2B5EF4-FFF2-40B4-BE49-F238E27FC236}">
-                <a16:creationId xmlns:a16="http://schemas.microsoft.com/office/drawing/2014/main" id="{DBFB5958-4857-00CF-CA14-95593EAB43FF}"/>
+                <a16:creationId xmlns:a16="http://schemas.microsoft.com/office/drawing/2014/main" id="{38DA005E-3037-614B-F15F-C4CA1341A6BB}"/>
               </a:ext>
             </a:extLst>
           </p:cNvPr>
@@ -3714,7 +3714,7 @@
           <p:cNvPr id="4" name="テキスト ボックス 3">
             <a:extLst>
               <a:ext uri="{FF2B5EF4-FFF2-40B4-BE49-F238E27FC236}">
-                <a16:creationId xmlns:a16="http://schemas.microsoft.com/office/drawing/2014/main" id="{4EC3623F-6834-F384-0C09-DD6B5F1DF1D4}"/>
+                <a16:creationId xmlns:a16="http://schemas.microsoft.com/office/drawing/2014/main" id="{69F6A4AA-C0BF-941F-8C1E-D22158EC26AB}"/>
               </a:ext>
             </a:extLst>
           </p:cNvPr>
@@ -3754,7 +3754,7 @@
           <p:cNvPr id="5" name="テキスト ボックス 4">
             <a:extLst>
               <a:ext uri="{FF2B5EF4-FFF2-40B4-BE49-F238E27FC236}">
-                <a16:creationId xmlns:a16="http://schemas.microsoft.com/office/drawing/2014/main" id="{C677D19C-F8B8-58E8-9693-C9F3EC1B8D1E}"/>
+                <a16:creationId xmlns:a16="http://schemas.microsoft.com/office/drawing/2014/main" id="{CE91DC58-C427-FBF8-8717-C8E59185762A}"/>
               </a:ext>
             </a:extLst>
           </p:cNvPr>
@@ -3801,7 +3801,7 @@
             <a:hlinkClick r:id="" action="ppaction://media"/>
             <a:extLst>
               <a:ext uri="{FF2B5EF4-FFF2-40B4-BE49-F238E27FC236}">
-                <a16:creationId xmlns:a16="http://schemas.microsoft.com/office/drawing/2014/main" id="{1ADDB2EB-E977-EF2E-3ED3-68CD58DBA1DB}"/>
+                <a16:creationId xmlns:a16="http://schemas.microsoft.com/office/drawing/2014/main" id="{1BAA1682-1778-6D20-F49B-7D381F869497}"/>
               </a:ext>
             </a:extLst>
           </p:cNvPr>
@@ -3836,7 +3836,7 @@
     </p:spTree>
     <p:extLst>
       <p:ext uri="{BB962C8B-B14F-4D97-AF65-F5344CB8AC3E}">
-        <p14:creationId xmlns:p14="http://schemas.microsoft.com/office/powerpoint/2010/main" val="3871679068"/>
+        <p14:creationId xmlns:p14="http://schemas.microsoft.com/office/powerpoint/2010/main" val="1215849168"/>
       </p:ext>
     </p:extLst>
   </p:cSld>
@@ -3960,7 +3960,7 @@
           <p:cNvPr id="2" name="テキスト ボックス 1">
             <a:extLst>
               <a:ext uri="{FF2B5EF4-FFF2-40B4-BE49-F238E27FC236}">
-                <a16:creationId xmlns:a16="http://schemas.microsoft.com/office/drawing/2014/main" id="{361E47DC-09D2-D52F-BB21-E7E78FD8F116}"/>
+                <a16:creationId xmlns:a16="http://schemas.microsoft.com/office/drawing/2014/main" id="{C7BD1213-5044-7691-D177-AD3B7B1AB5ED}"/>
               </a:ext>
             </a:extLst>
           </p:cNvPr>
@@ -4006,7 +4006,7 @@
           <p:cNvPr id="3" name="テキスト ボックス 2">
             <a:extLst>
               <a:ext uri="{FF2B5EF4-FFF2-40B4-BE49-F238E27FC236}">
-                <a16:creationId xmlns:a16="http://schemas.microsoft.com/office/drawing/2014/main" id="{7C1E34A0-7379-1A8E-74C2-83E54BEC8270}"/>
+                <a16:creationId xmlns:a16="http://schemas.microsoft.com/office/drawing/2014/main" id="{3E42A4FB-4DD3-EC4A-D5CD-952965791596}"/>
               </a:ext>
             </a:extLst>
           </p:cNvPr>
@@ -4046,7 +4046,7 @@
           <p:cNvPr id="4" name="テキスト ボックス 3">
             <a:extLst>
               <a:ext uri="{FF2B5EF4-FFF2-40B4-BE49-F238E27FC236}">
-                <a16:creationId xmlns:a16="http://schemas.microsoft.com/office/drawing/2014/main" id="{F0B33313-7DC2-001A-4BDB-571A5FEFFD70}"/>
+                <a16:creationId xmlns:a16="http://schemas.microsoft.com/office/drawing/2014/main" id="{E65D7A06-DFCF-0DB1-E33D-66FCAD9E8D22}"/>
               </a:ext>
             </a:extLst>
           </p:cNvPr>
@@ -4076,14 +4076,17 @@
                 </a:solidFill>
                 <a:latin typeface="Arial" panose="020B0604020202020204" pitchFamily="34" charset="0"/>
               </a:rPr>
-              <a:t>This is a Next</a:t>
-            </a:r>
-            <a:endParaRPr kumimoji="1" lang="ja-JP" altLang="en-US" sz="2000">
-              <a:solidFill>
-                <a:srgbClr val="333333"/>
-              </a:solidFill>
-              <a:latin typeface="Arial" panose="020B0604020202020204" pitchFamily="34" charset="0"/>
-            </a:endParaRPr>
+              <a:t>Reserve Sys</a:t>
+            </a:r>
+            <a:r>
+              <a:rPr kumimoji="1" lang="ja-JP" altLang="en-US" sz="2000">
+                <a:solidFill>
+                  <a:srgbClr val="333333"/>
+                </a:solidFill>
+                <a:latin typeface="Arial" panose="020B0604020202020204" pitchFamily="34" charset="0"/>
+              </a:rPr>
+              <a:t>の目的、構成、実装を公開コードから確認できるプロジェクトです。</a:t>
+            </a:r>
           </a:p>
         </p:txBody>
       </p:sp>
@@ -4092,7 +4095,7 @@
           <p:cNvPr id="5" name="テキスト ボックス 4">
             <a:extLst>
               <a:ext uri="{FF2B5EF4-FFF2-40B4-BE49-F238E27FC236}">
-                <a16:creationId xmlns:a16="http://schemas.microsoft.com/office/drawing/2014/main" id="{5D543BD2-D6BF-4E76-2401-D59FD7504294}"/>
+                <a16:creationId xmlns:a16="http://schemas.microsoft.com/office/drawing/2014/main" id="{490B29FD-743B-3938-5A7C-649DEB9EB0E1}"/>
               </a:ext>
             </a:extLst>
           </p:cNvPr>
@@ -4139,7 +4142,7 @@
             <a:hlinkClick r:id="" action="ppaction://media"/>
             <a:extLst>
               <a:ext uri="{FF2B5EF4-FFF2-40B4-BE49-F238E27FC236}">
-                <a16:creationId xmlns:a16="http://schemas.microsoft.com/office/drawing/2014/main" id="{213B4AB9-2501-E186-B9D7-6196EF5CBC26}"/>
+                <a16:creationId xmlns:a16="http://schemas.microsoft.com/office/drawing/2014/main" id="{E8A9EA5D-F1D1-0042-F915-D6CCF1C814E3}"/>
               </a:ext>
             </a:extLst>
           </p:cNvPr>
@@ -4174,7 +4177,7 @@
     </p:spTree>
     <p:extLst>
       <p:ext uri="{BB962C8B-B14F-4D97-AF65-F5344CB8AC3E}">
-        <p14:creationId xmlns:p14="http://schemas.microsoft.com/office/powerpoint/2010/main" val="4061163564"/>
+        <p14:creationId xmlns:p14="http://schemas.microsoft.com/office/powerpoint/2010/main" val="929920865"/>
       </p:ext>
     </p:extLst>
   </p:cSld>
@@ -4183,10 +4186,10 @@
   </p:clrMapOvr>
   <mc:AlternateContent xmlns:mc="http://schemas.openxmlformats.org/markup-compatibility/2006">
     <mc:Choice xmlns:p14="http://schemas.microsoft.com/office/powerpoint/2010/main" Requires="p14">
-      <p:transition spd="slow" p14:dur="2000" advTm="5000"/>
+      <p:transition spd="slow" p14:dur="2000" advTm="8000"/>
     </mc:Choice>
     <mc:Fallback>
-      <p:transition spd="slow" advTm="5000"/>
+      <p:transition spd="slow" advTm="8000"/>
     </mc:Fallback>
   </mc:AlternateContent>
   <p:timing>
@@ -4217,7 +4220,7 @@
                                   <p:childTnLst>
                                     <p:cmd type="call" cmd="playFrom(0.0)">
                                       <p:cBhvr>
-                                        <p:cTn id="6" dur="2148" fill="hold"/>
+                                        <p:cTn id="6" dur="7486" fill="hold"/>
                                         <p:tgtEl>
                                           <p:spTgt spid="6"/>
                                         </p:tgtEl>
@@ -4298,7 +4301,7 @@
           <p:cNvPr id="2" name="テキスト ボックス 1">
             <a:extLst>
               <a:ext uri="{FF2B5EF4-FFF2-40B4-BE49-F238E27FC236}">
-                <a16:creationId xmlns:a16="http://schemas.microsoft.com/office/drawing/2014/main" id="{ED8D5893-E079-40B3-B4C6-A37DA4A82846}"/>
+                <a16:creationId xmlns:a16="http://schemas.microsoft.com/office/drawing/2014/main" id="{4D07EFBC-0567-44E6-C315-03709F7773D8}"/>
               </a:ext>
             </a:extLst>
           </p:cNvPr>
@@ -4344,7 +4347,7 @@
           <p:cNvPr id="3" name="テキスト ボックス 2">
             <a:extLst>
               <a:ext uri="{FF2B5EF4-FFF2-40B4-BE49-F238E27FC236}">
-                <a16:creationId xmlns:a16="http://schemas.microsoft.com/office/drawing/2014/main" id="{87A2E721-8EA1-A11D-E6A1-1B105D91F162}"/>
+                <a16:creationId xmlns:a16="http://schemas.microsoft.com/office/drawing/2014/main" id="{436F54A8-3187-57E9-C7A3-66EAD94CE27D}"/>
               </a:ext>
             </a:extLst>
           </p:cNvPr>
@@ -4384,7 +4387,7 @@
           <p:cNvPr id="4" name="テキスト ボックス 3">
             <a:extLst>
               <a:ext uri="{FF2B5EF4-FFF2-40B4-BE49-F238E27FC236}">
-                <a16:creationId xmlns:a16="http://schemas.microsoft.com/office/drawing/2014/main" id="{E36F181B-766B-AA97-F3F4-C8B36E71E113}"/>
+                <a16:creationId xmlns:a16="http://schemas.microsoft.com/office/drawing/2014/main" id="{98CCDD87-A474-965C-39EE-97723C6C918A}"/>
               </a:ext>
             </a:extLst>
           </p:cNvPr>
@@ -4479,7 +4482,7 @@
           <p:cNvPr id="5" name="テキスト ボックス 4">
             <a:extLst>
               <a:ext uri="{FF2B5EF4-FFF2-40B4-BE49-F238E27FC236}">
-                <a16:creationId xmlns:a16="http://schemas.microsoft.com/office/drawing/2014/main" id="{8A27A9A9-E9DD-4175-6E77-2F1F6586C9A4}"/>
+                <a16:creationId xmlns:a16="http://schemas.microsoft.com/office/drawing/2014/main" id="{C7A80C74-238C-A063-6052-90A8EE04FA49}"/>
               </a:ext>
             </a:extLst>
           </p:cNvPr>
@@ -4526,7 +4529,7 @@
             <a:hlinkClick r:id="" action="ppaction://media"/>
             <a:extLst>
               <a:ext uri="{FF2B5EF4-FFF2-40B4-BE49-F238E27FC236}">
-                <a16:creationId xmlns:a16="http://schemas.microsoft.com/office/drawing/2014/main" id="{12C3386C-E169-F00C-80B6-9161CA98EC74}"/>
+                <a16:creationId xmlns:a16="http://schemas.microsoft.com/office/drawing/2014/main" id="{90DC6486-0E98-0114-71D4-D323B21013E9}"/>
               </a:ext>
             </a:extLst>
           </p:cNvPr>
@@ -4561,7 +4564,7 @@
     </p:spTree>
     <p:extLst>
       <p:ext uri="{BB962C8B-B14F-4D97-AF65-F5344CB8AC3E}">
-        <p14:creationId xmlns:p14="http://schemas.microsoft.com/office/powerpoint/2010/main" val="1710219966"/>
+        <p14:creationId xmlns:p14="http://schemas.microsoft.com/office/powerpoint/2010/main" val="393046910"/>
       </p:ext>
     </p:extLst>
   </p:cSld>
@@ -4685,7 +4688,7 @@
           <p:cNvPr id="2" name="テキスト ボックス 1">
             <a:extLst>
               <a:ext uri="{FF2B5EF4-FFF2-40B4-BE49-F238E27FC236}">
-                <a16:creationId xmlns:a16="http://schemas.microsoft.com/office/drawing/2014/main" id="{5EB816C7-541F-40C1-14EF-5A8863C3ACA2}"/>
+                <a16:creationId xmlns:a16="http://schemas.microsoft.com/office/drawing/2014/main" id="{A9860E29-DEE8-76B0-A1BD-2BC8B5FCF0ED}"/>
               </a:ext>
             </a:extLst>
           </p:cNvPr>
@@ -4731,7 +4734,7 @@
           <p:cNvPr id="3" name="テキスト ボックス 2">
             <a:extLst>
               <a:ext uri="{FF2B5EF4-FFF2-40B4-BE49-F238E27FC236}">
-                <a16:creationId xmlns:a16="http://schemas.microsoft.com/office/drawing/2014/main" id="{534F3D65-5298-D452-80C6-471B6D73B0D4}"/>
+                <a16:creationId xmlns:a16="http://schemas.microsoft.com/office/drawing/2014/main" id="{CD657048-6CF3-FFCC-D5B4-D6B40A6645E7}"/>
               </a:ext>
             </a:extLst>
           </p:cNvPr>
@@ -4771,7 +4774,7 @@
           <p:cNvPr id="4" name="テキスト ボックス 3">
             <a:extLst>
               <a:ext uri="{FF2B5EF4-FFF2-40B4-BE49-F238E27FC236}">
-                <a16:creationId xmlns:a16="http://schemas.microsoft.com/office/drawing/2014/main" id="{4712BC01-09CF-098B-BE75-D849E0AFB9B8}"/>
+                <a16:creationId xmlns:a16="http://schemas.microsoft.com/office/drawing/2014/main" id="{AC0459CD-E2DF-28EC-0A66-5280C4A9A6A9}"/>
               </a:ext>
             </a:extLst>
           </p:cNvPr>
@@ -4881,7 +4884,7 @@
           <p:cNvPr id="5" name="テキスト ボックス 4">
             <a:extLst>
               <a:ext uri="{FF2B5EF4-FFF2-40B4-BE49-F238E27FC236}">
-                <a16:creationId xmlns:a16="http://schemas.microsoft.com/office/drawing/2014/main" id="{596DFBB5-BCA9-9C1D-02A9-32AA315B1E0E}"/>
+                <a16:creationId xmlns:a16="http://schemas.microsoft.com/office/drawing/2014/main" id="{699C3A64-6904-ABE7-385C-3E9F5CE491A5}"/>
               </a:ext>
             </a:extLst>
           </p:cNvPr>
@@ -4928,7 +4931,7 @@
             <a:hlinkClick r:id="" action="ppaction://media"/>
             <a:extLst>
               <a:ext uri="{FF2B5EF4-FFF2-40B4-BE49-F238E27FC236}">
-                <a16:creationId xmlns:a16="http://schemas.microsoft.com/office/drawing/2014/main" id="{D8DA8DA5-AC88-18FC-BFC9-62FB42E322FE}"/>
+                <a16:creationId xmlns:a16="http://schemas.microsoft.com/office/drawing/2014/main" id="{145D0FB2-23D5-8A62-AD26-0837092365FD}"/>
               </a:ext>
             </a:extLst>
           </p:cNvPr>
@@ -4963,7 +4966,7 @@
     </p:spTree>
     <p:extLst>
       <p:ext uri="{BB962C8B-B14F-4D97-AF65-F5344CB8AC3E}">
-        <p14:creationId xmlns:p14="http://schemas.microsoft.com/office/powerpoint/2010/main" val="1788880337"/>
+        <p14:creationId xmlns:p14="http://schemas.microsoft.com/office/powerpoint/2010/main" val="2587373849"/>
       </p:ext>
     </p:extLst>
   </p:cSld>
@@ -5087,7 +5090,7 @@
           <p:cNvPr id="2" name="テキスト ボックス 1">
             <a:extLst>
               <a:ext uri="{FF2B5EF4-FFF2-40B4-BE49-F238E27FC236}">
-                <a16:creationId xmlns:a16="http://schemas.microsoft.com/office/drawing/2014/main" id="{D6826490-193D-4F42-AAA9-6D67555DAE34}"/>
+                <a16:creationId xmlns:a16="http://schemas.microsoft.com/office/drawing/2014/main" id="{3FE1506A-F291-755A-32A5-90867DBA8623}"/>
               </a:ext>
             </a:extLst>
           </p:cNvPr>
@@ -5133,7 +5136,7 @@
           <p:cNvPr id="3" name="テキスト ボックス 2">
             <a:extLst>
               <a:ext uri="{FF2B5EF4-FFF2-40B4-BE49-F238E27FC236}">
-                <a16:creationId xmlns:a16="http://schemas.microsoft.com/office/drawing/2014/main" id="{AEAE40A8-390B-4407-A73D-78D8428A14EC}"/>
+                <a16:creationId xmlns:a16="http://schemas.microsoft.com/office/drawing/2014/main" id="{5942C9E8-29CE-EF43-F13E-4E4D8B91BE08}"/>
               </a:ext>
             </a:extLst>
           </p:cNvPr>
@@ -5173,7 +5176,7 @@
           <p:cNvPr id="4" name="テキスト ボックス 3">
             <a:extLst>
               <a:ext uri="{FF2B5EF4-FFF2-40B4-BE49-F238E27FC236}">
-                <a16:creationId xmlns:a16="http://schemas.microsoft.com/office/drawing/2014/main" id="{3133E7B3-C888-0BCC-0C46-959D103B9CE6}"/>
+                <a16:creationId xmlns:a16="http://schemas.microsoft.com/office/drawing/2014/main" id="{5D444DFC-63DC-CA8D-B1D2-4794B44E0564}"/>
               </a:ext>
             </a:extLst>
           </p:cNvPr>
@@ -5197,20 +5200,14 @@
           <a:lstStyle/>
           <a:p>
             <a:r>
-              <a:rPr kumimoji="1" lang="en-US" altLang="ja-JP" sz="2000">
+              <a:rPr kumimoji="1" lang="ja-JP" altLang="en-US" sz="2000">
                 <a:solidFill>
                   <a:srgbClr val="333333"/>
                 </a:solidFill>
                 <a:latin typeface="Arial" panose="020B0604020202020204" pitchFamily="34" charset="0"/>
               </a:rPr>
-              <a:t>Initial multi-tenant reservation system MVP</a:t>
-            </a:r>
-            <a:endParaRPr kumimoji="1" lang="ja-JP" altLang="en-US" sz="2000">
-              <a:solidFill>
-                <a:srgbClr val="333333"/>
-              </a:solidFill>
-              <a:latin typeface="Arial" panose="020B0604020202020204" pitchFamily="34" charset="0"/>
-            </a:endParaRPr>
+              <a:t>直近のコミットでは、プロジェクトの初期構成と開発基盤が整備されました。</a:t>
+            </a:r>
           </a:p>
         </p:txBody>
       </p:sp>
@@ -5219,7 +5216,7 @@
           <p:cNvPr id="5" name="テキスト ボックス 4">
             <a:extLst>
               <a:ext uri="{FF2B5EF4-FFF2-40B4-BE49-F238E27FC236}">
-                <a16:creationId xmlns:a16="http://schemas.microsoft.com/office/drawing/2014/main" id="{0F217A9E-A0AC-FF95-8BA5-7A95C7753DE9}"/>
+                <a16:creationId xmlns:a16="http://schemas.microsoft.com/office/drawing/2014/main" id="{7738B9C8-4183-33B1-92D0-B78A3EE773AD}"/>
               </a:ext>
             </a:extLst>
           </p:cNvPr>
@@ -5266,7 +5263,7 @@
             <a:hlinkClick r:id="" action="ppaction://media"/>
             <a:extLst>
               <a:ext uri="{FF2B5EF4-FFF2-40B4-BE49-F238E27FC236}">
-                <a16:creationId xmlns:a16="http://schemas.microsoft.com/office/drawing/2014/main" id="{8FA1CBD0-095E-C926-E778-C9BE88F8E3BE}"/>
+                <a16:creationId xmlns:a16="http://schemas.microsoft.com/office/drawing/2014/main" id="{2F075B7A-25B0-F352-7E4E-29D7E9E5965F}"/>
               </a:ext>
             </a:extLst>
           </p:cNvPr>
@@ -5301,7 +5298,7 @@
     </p:spTree>
     <p:extLst>
       <p:ext uri="{BB962C8B-B14F-4D97-AF65-F5344CB8AC3E}">
-        <p14:creationId xmlns:p14="http://schemas.microsoft.com/office/powerpoint/2010/main" val="3530275594"/>
+        <p14:creationId xmlns:p14="http://schemas.microsoft.com/office/powerpoint/2010/main" val="2003520571"/>
       </p:ext>
     </p:extLst>
   </p:cSld>
@@ -5310,10 +5307,10 @@
   </p:clrMapOvr>
   <mc:AlternateContent xmlns:mc="http://schemas.openxmlformats.org/markup-compatibility/2006">
     <mc:Choice xmlns:p14="http://schemas.microsoft.com/office/powerpoint/2010/main" Requires="p14">
-      <p:transition spd="slow" p14:dur="2000" advTm="8000"/>
+      <p:transition spd="slow" p14:dur="2000" advTm="7000"/>
     </mc:Choice>
     <mc:Fallback>
-      <p:transition spd="slow" advTm="8000"/>
+      <p:transition spd="slow" advTm="7000"/>
     </mc:Fallback>
   </mc:AlternateContent>
   <p:timing>
@@ -5344,7 +5341,7 @@
                                   <p:childTnLst>
                                     <p:cmd type="call" cmd="playFrom(0.0)">
                                       <p:cBhvr>
-                                        <p:cTn id="6" dur="7501" fill="hold"/>
+                                        <p:cTn id="6" dur="6126" fill="hold"/>
                                         <p:tgtEl>
                                           <p:spTgt spid="6"/>
                                         </p:tgtEl>
@@ -5425,7 +5422,7 @@
           <p:cNvPr id="2" name="テキスト ボックス 1">
             <a:extLst>
               <a:ext uri="{FF2B5EF4-FFF2-40B4-BE49-F238E27FC236}">
-                <a16:creationId xmlns:a16="http://schemas.microsoft.com/office/drawing/2014/main" id="{AB22BAB6-76BD-6AA4-9925-788A92C5E6B2}"/>
+                <a16:creationId xmlns:a16="http://schemas.microsoft.com/office/drawing/2014/main" id="{6A382DD9-6731-38D0-1D10-C7DA3727954A}"/>
               </a:ext>
             </a:extLst>
           </p:cNvPr>
@@ -5471,7 +5468,7 @@
           <p:cNvPr id="3" name="テキスト ボックス 2">
             <a:extLst>
               <a:ext uri="{FF2B5EF4-FFF2-40B4-BE49-F238E27FC236}">
-                <a16:creationId xmlns:a16="http://schemas.microsoft.com/office/drawing/2014/main" id="{6FE9A86E-F886-11FA-3F7B-A02B782848B2}"/>
+                <a16:creationId xmlns:a16="http://schemas.microsoft.com/office/drawing/2014/main" id="{9205DBB7-5EE9-65E4-8FC5-760D2D3D4A22}"/>
               </a:ext>
             </a:extLst>
           </p:cNvPr>
@@ -5511,7 +5508,7 @@
           <p:cNvPr id="4" name="テキスト ボックス 3">
             <a:extLst>
               <a:ext uri="{FF2B5EF4-FFF2-40B4-BE49-F238E27FC236}">
-                <a16:creationId xmlns:a16="http://schemas.microsoft.com/office/drawing/2014/main" id="{AA13F1C7-5AB6-B29E-09AC-ABA91AE9B6BF}"/>
+                <a16:creationId xmlns:a16="http://schemas.microsoft.com/office/drawing/2014/main" id="{1F3BF418-D90D-1BB1-0660-4A87820C2126}"/>
               </a:ext>
             </a:extLst>
           </p:cNvPr>
@@ -5576,7 +5573,7 @@
           <p:cNvPr id="5" name="テキスト ボックス 4">
             <a:extLst>
               <a:ext uri="{FF2B5EF4-FFF2-40B4-BE49-F238E27FC236}">
-                <a16:creationId xmlns:a16="http://schemas.microsoft.com/office/drawing/2014/main" id="{06F3B3CE-9F95-3D01-1BFB-B95E4C9C7C26}"/>
+                <a16:creationId xmlns:a16="http://schemas.microsoft.com/office/drawing/2014/main" id="{D6A23AE1-98A2-F1CD-83C4-6687853D5764}"/>
               </a:ext>
             </a:extLst>
           </p:cNvPr>
@@ -5623,7 +5620,7 @@
             <a:hlinkClick r:id="" action="ppaction://media"/>
             <a:extLst>
               <a:ext uri="{FF2B5EF4-FFF2-40B4-BE49-F238E27FC236}">
-                <a16:creationId xmlns:a16="http://schemas.microsoft.com/office/drawing/2014/main" id="{52C27C96-4E91-BB96-8788-03CD0ACAA73B}"/>
+                <a16:creationId xmlns:a16="http://schemas.microsoft.com/office/drawing/2014/main" id="{4B2EB7F8-B746-E80A-EFD4-C4D4B979C0E5}"/>
               </a:ext>
             </a:extLst>
           </p:cNvPr>
@@ -5658,7 +5655,7 @@
     </p:spTree>
     <p:extLst>
       <p:ext uri="{BB962C8B-B14F-4D97-AF65-F5344CB8AC3E}">
-        <p14:creationId xmlns:p14="http://schemas.microsoft.com/office/powerpoint/2010/main" val="2202240329"/>
+        <p14:creationId xmlns:p14="http://schemas.microsoft.com/office/powerpoint/2010/main" val="1240026860"/>
       </p:ext>
     </p:extLst>
   </p:cSld>
